--- a/presentation/Presentation.pptx
+++ b/presentation/Presentation.pptx
@@ -16,6 +16,12 @@
     <p:sldId id="261" r:id="rId11"/>
     <p:sldId id="262" r:id="rId12"/>
     <p:sldId id="263" r:id="rId13"/>
+    <p:sldId id="264" r:id="rId14"/>
+    <p:sldId id="265" r:id="rId15"/>
+    <p:sldId id="266" r:id="rId16"/>
+    <p:sldId id="267" r:id="rId17"/>
+    <p:sldId id="268" r:id="rId18"/>
+    <p:sldId id="269" r:id="rId19"/>
   </p:sldIdLst>
   <p:sldSz cy="5143500" cx="9144000"/>
   <p:notesSz cx="6858000" cy="9144000"/>
@@ -792,6 +798,501 @@
 </p:notes>
 </file>
 
+<file path=ppt/notesSlides/notesSlide10.xml><?xml version="1.0" encoding="utf-8"?>
+<p:notes xmlns:a="http://schemas.openxmlformats.org/drawingml/2006/main" xmlns:r="http://schemas.openxmlformats.org/officeDocument/2006/relationships" xmlns:mc="http://schemas.openxmlformats.org/markup-compatibility/2006" xmlns:mv="urn:schemas-microsoft-com:mac:vml" xmlns:p="http://schemas.openxmlformats.org/presentationml/2006/main" xmlns:c="http://schemas.openxmlformats.org/drawingml/2006/chart" xmlns:dgm="http://schemas.openxmlformats.org/drawingml/2006/diagram" xmlns:o="urn:schemas-microsoft-com:office:office" xmlns:v="urn:schemas-microsoft-com:vml" xmlns:pvml="urn:schemas-microsoft-com:office:powerpoint" xmlns:com="http://schemas.openxmlformats.org/drawingml/2006/compatibility" xmlns:p14="http://schemas.microsoft.com/office/powerpoint/2010/main" xmlns:p15="http://schemas.microsoft.com/office/powerpoint/2012/main" xmlns:ahyp="http://schemas.microsoft.com/office/drawing/2018/hyperlinkcolor" showMasterPhAnim="0" showMasterSp="0">
+  <p:cSld>
+    <p:spTree>
+      <p:nvGrpSpPr>
+        <p:cNvPr id="111" name="Shape 111"/>
+        <p:cNvGrpSpPr/>
+        <p:nvPr/>
+      </p:nvGrpSpPr>
+      <p:grpSpPr>
+        <a:xfrm>
+          <a:off x="0" y="0"/>
+          <a:ext cx="0" cy="0"/>
+          <a:chOff x="0" y="0"/>
+          <a:chExt cx="0" cy="0"/>
+        </a:xfrm>
+      </p:grpSpPr>
+      <p:sp>
+        <p:nvSpPr>
+          <p:cNvPr id="112" name="Google Shape;112;h470167a17a141f5f_0_0:notes"/>
+          <p:cNvSpPr/>
+          <p:nvPr>
+            <p:ph idx="2" type="sldImg"/>
+          </p:nvPr>
+        </p:nvSpPr>
+        <p:spPr>
+          <a:xfrm>
+            <a:off x="381300" y="685800"/>
+            <a:ext cx="6096000" cy="3429000"/>
+          </a:xfrm>
+          <a:custGeom>
+            <a:rect b="b" l="l" r="r" t="t"/>
+            <a:pathLst>
+              <a:path extrusionOk="0" h="120000" w="120000">
+                <a:moveTo>
+                  <a:pt x="0" y="0"/>
+                </a:moveTo>
+                <a:lnTo>
+                  <a:pt x="120000" y="0"/>
+                </a:lnTo>
+                <a:lnTo>
+                  <a:pt x="120000" y="120000"/>
+                </a:lnTo>
+                <a:lnTo>
+                  <a:pt x="0" y="120000"/>
+                </a:lnTo>
+                <a:close/>
+              </a:path>
+            </a:pathLst>
+          </a:custGeom>
+        </p:spPr>
+      </p:sp>
+      <p:sp>
+        <p:nvSpPr>
+          <p:cNvPr id="113" name="Google Shape;113;h470167a17a141f5f_0_0:notes"/>
+          <p:cNvSpPr txBox="1"/>
+          <p:nvPr>
+            <p:ph idx="1" type="body"/>
+          </p:nvPr>
+        </p:nvSpPr>
+        <p:spPr>
+          <a:xfrm>
+            <a:off x="685800" y="4343400"/>
+            <a:ext cx="5486400" cy="4114800"/>
+          </a:xfrm>
+          <a:prstGeom prst="rect">
+            <a:avLst/>
+          </a:prstGeom>
+        </p:spPr>
+        <p:txBody>
+          <a:bodyPr anchorCtr="0" anchor="t" bIns="91425" lIns="91425" spcFirstLastPara="1" rIns="91425" wrap="square" tIns="91425">
+            <a:noAutofit/>
+          </a:bodyPr>
+          <a:lstStyle/>
+          <a:p>
+            <a:pPr indent="0" lvl="0" marL="0" rtl="0" algn="l">
+              <a:spcBef>
+                <a:spcPts val="0"/>
+              </a:spcBef>
+              <a:spcAft>
+                <a:spcPts val="0"/>
+              </a:spcAft>
+              <a:buNone/>
+            </a:pPr>
+            <a:r>
+              <a:t/>
+            </a:r>
+            <a:endParaRPr/>
+          </a:p>
+        </p:txBody>
+      </p:sp>
+    </p:spTree>
+  </p:cSld>
+  <p:clrMapOvr>
+    <a:masterClrMapping/>
+  </p:clrMapOvr>
+</p:notes>
+</file>
+
+<file path=ppt/notesSlides/notesSlide11.xml><?xml version="1.0" encoding="utf-8"?>
+<p:notes xmlns:a="http://schemas.openxmlformats.org/drawingml/2006/main" xmlns:r="http://schemas.openxmlformats.org/officeDocument/2006/relationships" xmlns:mc="http://schemas.openxmlformats.org/markup-compatibility/2006" xmlns:mv="urn:schemas-microsoft-com:mac:vml" xmlns:p="http://schemas.openxmlformats.org/presentationml/2006/main" xmlns:c="http://schemas.openxmlformats.org/drawingml/2006/chart" xmlns:dgm="http://schemas.openxmlformats.org/drawingml/2006/diagram" xmlns:o="urn:schemas-microsoft-com:office:office" xmlns:v="urn:schemas-microsoft-com:vml" xmlns:pvml="urn:schemas-microsoft-com:office:powerpoint" xmlns:com="http://schemas.openxmlformats.org/drawingml/2006/compatibility" xmlns:p14="http://schemas.microsoft.com/office/powerpoint/2010/main" xmlns:p15="http://schemas.microsoft.com/office/powerpoint/2012/main" xmlns:ahyp="http://schemas.microsoft.com/office/drawing/2018/hyperlinkcolor" showMasterPhAnim="0" showMasterSp="0">
+  <p:cSld>
+    <p:spTree>
+      <p:nvGrpSpPr>
+        <p:cNvPr id="117" name="Shape 117"/>
+        <p:cNvGrpSpPr/>
+        <p:nvPr/>
+      </p:nvGrpSpPr>
+      <p:grpSpPr>
+        <a:xfrm>
+          <a:off x="0" y="0"/>
+          <a:ext cx="0" cy="0"/>
+          <a:chOff x="0" y="0"/>
+          <a:chExt cx="0" cy="0"/>
+        </a:xfrm>
+      </p:grpSpPr>
+      <p:sp>
+        <p:nvSpPr>
+          <p:cNvPr id="118" name="Google Shape;118;h470167a17a141f5f_0_5:notes"/>
+          <p:cNvSpPr/>
+          <p:nvPr>
+            <p:ph idx="2" type="sldImg"/>
+          </p:nvPr>
+        </p:nvSpPr>
+        <p:spPr>
+          <a:xfrm>
+            <a:off x="381300" y="685800"/>
+            <a:ext cx="6096000" cy="3429000"/>
+          </a:xfrm>
+          <a:custGeom>
+            <a:rect b="b" l="l" r="r" t="t"/>
+            <a:pathLst>
+              <a:path extrusionOk="0" h="120000" w="120000">
+                <a:moveTo>
+                  <a:pt x="0" y="0"/>
+                </a:moveTo>
+                <a:lnTo>
+                  <a:pt x="120000" y="0"/>
+                </a:lnTo>
+                <a:lnTo>
+                  <a:pt x="120000" y="120000"/>
+                </a:lnTo>
+                <a:lnTo>
+                  <a:pt x="0" y="120000"/>
+                </a:lnTo>
+                <a:close/>
+              </a:path>
+            </a:pathLst>
+          </a:custGeom>
+        </p:spPr>
+      </p:sp>
+      <p:sp>
+        <p:nvSpPr>
+          <p:cNvPr id="119" name="Google Shape;119;h470167a17a141f5f_0_5:notes"/>
+          <p:cNvSpPr txBox="1"/>
+          <p:nvPr>
+            <p:ph idx="1" type="body"/>
+          </p:nvPr>
+        </p:nvSpPr>
+        <p:spPr>
+          <a:xfrm>
+            <a:off x="685800" y="4343400"/>
+            <a:ext cx="5486400" cy="4114800"/>
+          </a:xfrm>
+          <a:prstGeom prst="rect">
+            <a:avLst/>
+          </a:prstGeom>
+        </p:spPr>
+        <p:txBody>
+          <a:bodyPr anchorCtr="0" anchor="t" bIns="91425" lIns="91425" spcFirstLastPara="1" rIns="91425" wrap="square" tIns="91425">
+            <a:noAutofit/>
+          </a:bodyPr>
+          <a:lstStyle/>
+          <a:p>
+            <a:pPr indent="0" lvl="0" marL="0" rtl="0" algn="l">
+              <a:spcBef>
+                <a:spcPts val="0"/>
+              </a:spcBef>
+              <a:spcAft>
+                <a:spcPts val="0"/>
+              </a:spcAft>
+              <a:buNone/>
+            </a:pPr>
+            <a:r>
+              <a:t/>
+            </a:r>
+            <a:endParaRPr/>
+          </a:p>
+        </p:txBody>
+      </p:sp>
+    </p:spTree>
+  </p:cSld>
+  <p:clrMapOvr>
+    <a:masterClrMapping/>
+  </p:clrMapOvr>
+</p:notes>
+</file>
+
+<file path=ppt/notesSlides/notesSlide12.xml><?xml version="1.0" encoding="utf-8"?>
+<p:notes xmlns:a="http://schemas.openxmlformats.org/drawingml/2006/main" xmlns:r="http://schemas.openxmlformats.org/officeDocument/2006/relationships" xmlns:mc="http://schemas.openxmlformats.org/markup-compatibility/2006" xmlns:mv="urn:schemas-microsoft-com:mac:vml" xmlns:p="http://schemas.openxmlformats.org/presentationml/2006/main" xmlns:c="http://schemas.openxmlformats.org/drawingml/2006/chart" xmlns:dgm="http://schemas.openxmlformats.org/drawingml/2006/diagram" xmlns:o="urn:schemas-microsoft-com:office:office" xmlns:v="urn:schemas-microsoft-com:vml" xmlns:pvml="urn:schemas-microsoft-com:office:powerpoint" xmlns:com="http://schemas.openxmlformats.org/drawingml/2006/compatibility" xmlns:p14="http://schemas.microsoft.com/office/powerpoint/2010/main" xmlns:p15="http://schemas.microsoft.com/office/powerpoint/2012/main" xmlns:ahyp="http://schemas.microsoft.com/office/drawing/2018/hyperlinkcolor" showMasterPhAnim="0" showMasterSp="0">
+  <p:cSld>
+    <p:spTree>
+      <p:nvGrpSpPr>
+        <p:cNvPr id="123" name="Shape 123"/>
+        <p:cNvGrpSpPr/>
+        <p:nvPr/>
+      </p:nvGrpSpPr>
+      <p:grpSpPr>
+        <a:xfrm>
+          <a:off x="0" y="0"/>
+          <a:ext cx="0" cy="0"/>
+          <a:chOff x="0" y="0"/>
+          <a:chExt cx="0" cy="0"/>
+        </a:xfrm>
+      </p:grpSpPr>
+      <p:sp>
+        <p:nvSpPr>
+          <p:cNvPr id="124" name="Google Shape;124;h470167a17a141f5f_0_15:notes"/>
+          <p:cNvSpPr/>
+          <p:nvPr>
+            <p:ph idx="2" type="sldImg"/>
+          </p:nvPr>
+        </p:nvSpPr>
+        <p:spPr>
+          <a:xfrm>
+            <a:off x="381300" y="685800"/>
+            <a:ext cx="6096000" cy="3429000"/>
+          </a:xfrm>
+          <a:custGeom>
+            <a:rect b="b" l="l" r="r" t="t"/>
+            <a:pathLst>
+              <a:path extrusionOk="0" h="120000" w="120000">
+                <a:moveTo>
+                  <a:pt x="0" y="0"/>
+                </a:moveTo>
+                <a:lnTo>
+                  <a:pt x="120000" y="0"/>
+                </a:lnTo>
+                <a:lnTo>
+                  <a:pt x="120000" y="120000"/>
+                </a:lnTo>
+                <a:lnTo>
+                  <a:pt x="0" y="120000"/>
+                </a:lnTo>
+                <a:close/>
+              </a:path>
+            </a:pathLst>
+          </a:custGeom>
+        </p:spPr>
+      </p:sp>
+      <p:sp>
+        <p:nvSpPr>
+          <p:cNvPr id="125" name="Google Shape;125;h470167a17a141f5f_0_15:notes"/>
+          <p:cNvSpPr txBox="1"/>
+          <p:nvPr>
+            <p:ph idx="1" type="body"/>
+          </p:nvPr>
+        </p:nvSpPr>
+        <p:spPr>
+          <a:xfrm>
+            <a:off x="685800" y="4343400"/>
+            <a:ext cx="5486400" cy="4114800"/>
+          </a:xfrm>
+          <a:prstGeom prst="rect">
+            <a:avLst/>
+          </a:prstGeom>
+        </p:spPr>
+        <p:txBody>
+          <a:bodyPr anchorCtr="0" anchor="t" bIns="91425" lIns="91425" spcFirstLastPara="1" rIns="91425" wrap="square" tIns="91425">
+            <a:noAutofit/>
+          </a:bodyPr>
+          <a:lstStyle/>
+          <a:p>
+            <a:pPr indent="0" lvl="0" marL="0" rtl="0" algn="l">
+              <a:spcBef>
+                <a:spcPts val="0"/>
+              </a:spcBef>
+              <a:spcAft>
+                <a:spcPts val="0"/>
+              </a:spcAft>
+              <a:buNone/>
+            </a:pPr>
+            <a:r>
+              <a:t/>
+            </a:r>
+            <a:endParaRPr/>
+          </a:p>
+        </p:txBody>
+      </p:sp>
+    </p:spTree>
+  </p:cSld>
+  <p:clrMapOvr>
+    <a:masterClrMapping/>
+  </p:clrMapOvr>
+</p:notes>
+</file>
+
+<file path=ppt/notesSlides/notesSlide13.xml><?xml version="1.0" encoding="utf-8"?>
+<p:notes xmlns:a="http://schemas.openxmlformats.org/drawingml/2006/main" xmlns:r="http://schemas.openxmlformats.org/officeDocument/2006/relationships" xmlns:mc="http://schemas.openxmlformats.org/markup-compatibility/2006" xmlns:mv="urn:schemas-microsoft-com:mac:vml" xmlns:p="http://schemas.openxmlformats.org/presentationml/2006/main" xmlns:c="http://schemas.openxmlformats.org/drawingml/2006/chart" xmlns:dgm="http://schemas.openxmlformats.org/drawingml/2006/diagram" xmlns:o="urn:schemas-microsoft-com:office:office" xmlns:v="urn:schemas-microsoft-com:vml" xmlns:pvml="urn:schemas-microsoft-com:office:powerpoint" xmlns:com="http://schemas.openxmlformats.org/drawingml/2006/compatibility" xmlns:p14="http://schemas.microsoft.com/office/powerpoint/2010/main" xmlns:p15="http://schemas.microsoft.com/office/powerpoint/2012/main" xmlns:ahyp="http://schemas.microsoft.com/office/drawing/2018/hyperlinkcolor" showMasterPhAnim="0" showMasterSp="0">
+  <p:cSld>
+    <p:spTree>
+      <p:nvGrpSpPr>
+        <p:cNvPr id="129" name="Shape 129"/>
+        <p:cNvGrpSpPr/>
+        <p:nvPr/>
+      </p:nvGrpSpPr>
+      <p:grpSpPr>
+        <a:xfrm>
+          <a:off x="0" y="0"/>
+          <a:ext cx="0" cy="0"/>
+          <a:chOff x="0" y="0"/>
+          <a:chExt cx="0" cy="0"/>
+        </a:xfrm>
+      </p:grpSpPr>
+      <p:sp>
+        <p:nvSpPr>
+          <p:cNvPr id="130" name="Google Shape;130;h470167a17a141f5f_0_28:notes"/>
+          <p:cNvSpPr/>
+          <p:nvPr>
+            <p:ph idx="2" type="sldImg"/>
+          </p:nvPr>
+        </p:nvSpPr>
+        <p:spPr>
+          <a:xfrm>
+            <a:off x="381300" y="685800"/>
+            <a:ext cx="6096000" cy="3429000"/>
+          </a:xfrm>
+          <a:custGeom>
+            <a:rect b="b" l="l" r="r" t="t"/>
+            <a:pathLst>
+              <a:path extrusionOk="0" h="120000" w="120000">
+                <a:moveTo>
+                  <a:pt x="0" y="0"/>
+                </a:moveTo>
+                <a:lnTo>
+                  <a:pt x="120000" y="0"/>
+                </a:lnTo>
+                <a:lnTo>
+                  <a:pt x="120000" y="120000"/>
+                </a:lnTo>
+                <a:lnTo>
+                  <a:pt x="0" y="120000"/>
+                </a:lnTo>
+                <a:close/>
+              </a:path>
+            </a:pathLst>
+          </a:custGeom>
+        </p:spPr>
+      </p:sp>
+      <p:sp>
+        <p:nvSpPr>
+          <p:cNvPr id="131" name="Google Shape;131;h470167a17a141f5f_0_28:notes"/>
+          <p:cNvSpPr txBox="1"/>
+          <p:nvPr>
+            <p:ph idx="1" type="body"/>
+          </p:nvPr>
+        </p:nvSpPr>
+        <p:spPr>
+          <a:xfrm>
+            <a:off x="685800" y="4343400"/>
+            <a:ext cx="5486400" cy="4114800"/>
+          </a:xfrm>
+          <a:prstGeom prst="rect">
+            <a:avLst/>
+          </a:prstGeom>
+        </p:spPr>
+        <p:txBody>
+          <a:bodyPr anchorCtr="0" anchor="t" bIns="91425" lIns="91425" spcFirstLastPara="1" rIns="91425" wrap="square" tIns="91425">
+            <a:noAutofit/>
+          </a:bodyPr>
+          <a:lstStyle/>
+          <a:p>
+            <a:pPr indent="0" lvl="0" marL="0" rtl="0" algn="l">
+              <a:spcBef>
+                <a:spcPts val="0"/>
+              </a:spcBef>
+              <a:spcAft>
+                <a:spcPts val="0"/>
+              </a:spcAft>
+              <a:buNone/>
+            </a:pPr>
+            <a:r>
+              <a:t/>
+            </a:r>
+            <a:endParaRPr/>
+          </a:p>
+        </p:txBody>
+      </p:sp>
+    </p:spTree>
+  </p:cSld>
+  <p:clrMapOvr>
+    <a:masterClrMapping/>
+  </p:clrMapOvr>
+</p:notes>
+</file>
+
+<file path=ppt/notesSlides/notesSlide14.xml><?xml version="1.0" encoding="utf-8"?>
+<p:notes xmlns:a="http://schemas.openxmlformats.org/drawingml/2006/main" xmlns:r="http://schemas.openxmlformats.org/officeDocument/2006/relationships" xmlns:mc="http://schemas.openxmlformats.org/markup-compatibility/2006" xmlns:mv="urn:schemas-microsoft-com:mac:vml" xmlns:p="http://schemas.openxmlformats.org/presentationml/2006/main" xmlns:c="http://schemas.openxmlformats.org/drawingml/2006/chart" xmlns:dgm="http://schemas.openxmlformats.org/drawingml/2006/diagram" xmlns:o="urn:schemas-microsoft-com:office:office" xmlns:v="urn:schemas-microsoft-com:vml" xmlns:pvml="urn:schemas-microsoft-com:office:powerpoint" xmlns:com="http://schemas.openxmlformats.org/drawingml/2006/compatibility" xmlns:p14="http://schemas.microsoft.com/office/powerpoint/2010/main" xmlns:p15="http://schemas.microsoft.com/office/powerpoint/2012/main" xmlns:ahyp="http://schemas.microsoft.com/office/drawing/2018/hyperlinkcolor" showMasterPhAnim="0" showMasterSp="0">
+  <p:cSld>
+    <p:spTree>
+      <p:nvGrpSpPr>
+        <p:cNvPr id="137" name="Shape 137"/>
+        <p:cNvGrpSpPr/>
+        <p:nvPr/>
+      </p:nvGrpSpPr>
+      <p:grpSpPr>
+        <a:xfrm>
+          <a:off x="0" y="0"/>
+          <a:ext cx="0" cy="0"/>
+          <a:chOff x="0" y="0"/>
+          <a:chExt cx="0" cy="0"/>
+        </a:xfrm>
+      </p:grpSpPr>
+      <p:sp>
+        <p:nvSpPr>
+          <p:cNvPr id="138" name="Google Shape;138;h3761069c2471e205_0_26:notes"/>
+          <p:cNvSpPr/>
+          <p:nvPr>
+            <p:ph idx="2" type="sldImg"/>
+          </p:nvPr>
+        </p:nvSpPr>
+        <p:spPr>
+          <a:xfrm>
+            <a:off x="381300" y="685800"/>
+            <a:ext cx="6096000" cy="3429000"/>
+          </a:xfrm>
+          <a:custGeom>
+            <a:rect b="b" l="l" r="r" t="t"/>
+            <a:pathLst>
+              <a:path extrusionOk="0" h="120000" w="120000">
+                <a:moveTo>
+                  <a:pt x="0" y="0"/>
+                </a:moveTo>
+                <a:lnTo>
+                  <a:pt x="120000" y="0"/>
+                </a:lnTo>
+                <a:lnTo>
+                  <a:pt x="120000" y="120000"/>
+                </a:lnTo>
+                <a:lnTo>
+                  <a:pt x="0" y="120000"/>
+                </a:lnTo>
+                <a:close/>
+              </a:path>
+            </a:pathLst>
+          </a:custGeom>
+        </p:spPr>
+      </p:sp>
+      <p:sp>
+        <p:nvSpPr>
+          <p:cNvPr id="139" name="Google Shape;139;h3761069c2471e205_0_26:notes"/>
+          <p:cNvSpPr txBox="1"/>
+          <p:nvPr>
+            <p:ph idx="1" type="body"/>
+          </p:nvPr>
+        </p:nvSpPr>
+        <p:spPr>
+          <a:xfrm>
+            <a:off x="685800" y="4343400"/>
+            <a:ext cx="5486400" cy="4114800"/>
+          </a:xfrm>
+          <a:prstGeom prst="rect">
+            <a:avLst/>
+          </a:prstGeom>
+        </p:spPr>
+        <p:txBody>
+          <a:bodyPr anchorCtr="0" anchor="t" bIns="91425" lIns="91425" spcFirstLastPara="1" rIns="91425" wrap="square" tIns="91425">
+            <a:noAutofit/>
+          </a:bodyPr>
+          <a:lstStyle/>
+          <a:p>
+            <a:pPr indent="0" lvl="0" marL="0" rtl="0" algn="l">
+              <a:spcBef>
+                <a:spcPts val="0"/>
+              </a:spcBef>
+              <a:spcAft>
+                <a:spcPts val="0"/>
+              </a:spcAft>
+              <a:buNone/>
+            </a:pPr>
+            <a:r>
+              <a:t/>
+            </a:r>
+            <a:endParaRPr/>
+          </a:p>
+        </p:txBody>
+      </p:sp>
+    </p:spTree>
+  </p:cSld>
+  <p:clrMapOvr>
+    <a:masterClrMapping/>
+  </p:clrMapOvr>
+</p:notes>
+</file>
+
 <file path=ppt/notesSlides/notesSlide2.xml><?xml version="1.0" encoding="utf-8"?>
 <p:notes xmlns:a="http://schemas.openxmlformats.org/drawingml/2006/main" xmlns:r="http://schemas.openxmlformats.org/officeDocument/2006/relationships" xmlns:mc="http://schemas.openxmlformats.org/markup-compatibility/2006" xmlns:mv="urn:schemas-microsoft-com:mac:vml" xmlns:p="http://schemas.openxmlformats.org/presentationml/2006/main" xmlns:c="http://schemas.openxmlformats.org/drawingml/2006/chart" xmlns:dgm="http://schemas.openxmlformats.org/drawingml/2006/diagram" xmlns:o="urn:schemas-microsoft-com:office:office" xmlns:v="urn:schemas-microsoft-com:vml" xmlns:pvml="urn:schemas-microsoft-com:office:powerpoint" xmlns:com="http://schemas.openxmlformats.org/drawingml/2006/compatibility" xmlns:p14="http://schemas.microsoft.com/office/powerpoint/2010/main" xmlns:p15="http://schemas.microsoft.com/office/powerpoint/2012/main" xmlns:ahyp="http://schemas.microsoft.com/office/drawing/2018/hyperlinkcolor" showMasterPhAnim="0" showMasterSp="0">
   <p:cSld>
@@ -1263,19 +1764,63 @@
           </a:bodyPr>
           <a:lstStyle/>
           <a:p>
-            <a:pPr indent="0" lvl="0" marL="0" rtl="0" algn="l">
-              <a:spcBef>
-                <a:spcPts val="0"/>
-              </a:spcBef>
-              <a:spcAft>
-                <a:spcPts val="0"/>
-              </a:spcAft>
-              <a:buNone/>
-            </a:pPr>
-            <a:r>
-              <a:t/>
-            </a:r>
-            <a:endParaRPr/>
+            <a:pPr indent="-298450" lvl="0" marL="457200" rtl="0" algn="l">
+              <a:lnSpc>
+                <a:spcPct val="115000"/>
+              </a:lnSpc>
+              <a:spcBef>
+                <a:spcPts val="0"/>
+              </a:spcBef>
+              <a:spcAft>
+                <a:spcPts val="0"/>
+              </a:spcAft>
+              <a:buSzPts val="1100"/>
+              <a:buChar char="-"/>
+            </a:pPr>
+            <a:r>
+              <a:rPr lang="en" sz="1800">
+                <a:solidFill>
+                  <a:srgbClr val="595959"/>
+                </a:solidFill>
+              </a:rPr>
+              <a:t>In MLFQ scheduler, the priority is dynamic and changes based on processes behavior =&gt; Because of this inconsistency in priority, the challenge is to maintain and keep checking the priority of each processes. </a:t>
+            </a:r>
+            <a:endParaRPr sz="1800">
+              <a:solidFill>
+                <a:srgbClr val="595959"/>
+              </a:solidFill>
+            </a:endParaRPr>
+          </a:p>
+          <a:p>
+            <a:pPr indent="-342900" lvl="0" marL="457200" rtl="0" algn="l">
+              <a:lnSpc>
+                <a:spcPct val="115000"/>
+              </a:lnSpc>
+              <a:spcBef>
+                <a:spcPts val="0"/>
+              </a:spcBef>
+              <a:spcAft>
+                <a:spcPts val="0"/>
+              </a:spcAft>
+              <a:buClr>
+                <a:srgbClr val="595959"/>
+              </a:buClr>
+              <a:buSzPts val="1800"/>
+              <a:buChar char="-"/>
+            </a:pPr>
+            <a:r>
+              <a:rPr lang="en" sz="1800">
+                <a:solidFill>
+                  <a:srgbClr val="595959"/>
+                </a:solidFill>
+              </a:rPr>
+              <a:t>The time allotment: keep track </a:t>
+            </a:r>
+            <a:endParaRPr sz="1800">
+              <a:solidFill>
+                <a:srgbClr val="595959"/>
+              </a:solidFill>
+            </a:endParaRPr>
           </a:p>
         </p:txBody>
       </p:sp>
@@ -1292,7 +1837,7 @@
   <p:cSld>
     <p:spTree>
       <p:nvGrpSpPr>
-        <p:cNvPr id="89" name="Shape 89"/>
+        <p:cNvPr id="91" name="Shape 91"/>
         <p:cNvGrpSpPr/>
         <p:nvPr/>
       </p:nvGrpSpPr>
@@ -1306,7 +1851,7 @@
       </p:grpSpPr>
       <p:sp>
         <p:nvSpPr>
-          <p:cNvPr id="90" name="Google Shape;90;h3761069c2471e205_10_7:notes"/>
+          <p:cNvPr id="92" name="Google Shape;92;h3761069c2471e205_10_7:notes"/>
           <p:cNvSpPr/>
           <p:nvPr>
             <p:ph idx="2" type="sldImg"/>
@@ -1341,7 +1886,7 @@
       </p:sp>
       <p:sp>
         <p:nvSpPr>
-          <p:cNvPr id="91" name="Google Shape;91;h3761069c2471e205_10_7:notes"/>
+          <p:cNvPr id="93" name="Google Shape;93;h3761069c2471e205_10_7:notes"/>
           <p:cNvSpPr txBox="1"/>
           <p:nvPr>
             <p:ph idx="1" type="body"/>
@@ -1391,7 +1936,7 @@
   <p:cSld>
     <p:spTree>
       <p:nvGrpSpPr>
-        <p:cNvPr id="95" name="Shape 95"/>
+        <p:cNvPr id="99" name="Shape 99"/>
         <p:cNvGrpSpPr/>
         <p:nvPr/>
       </p:nvGrpSpPr>
@@ -1405,7 +1950,7 @@
       </p:grpSpPr>
       <p:sp>
         <p:nvSpPr>
-          <p:cNvPr id="96" name="Google Shape;96;h3761069c2471e205_0_26:notes"/>
+          <p:cNvPr id="100" name="Google Shape;100;h470167a17a141f5f_12_0:notes"/>
           <p:cNvSpPr/>
           <p:nvPr>
             <p:ph idx="2" type="sldImg"/>
@@ -1440,7 +1985,106 @@
       </p:sp>
       <p:sp>
         <p:nvSpPr>
-          <p:cNvPr id="97" name="Google Shape;97;h3761069c2471e205_0_26:notes"/>
+          <p:cNvPr id="101" name="Google Shape;101;h470167a17a141f5f_12_0:notes"/>
+          <p:cNvSpPr txBox="1"/>
+          <p:nvPr>
+            <p:ph idx="1" type="body"/>
+          </p:nvPr>
+        </p:nvSpPr>
+        <p:spPr>
+          <a:xfrm>
+            <a:off x="685800" y="4343400"/>
+            <a:ext cx="5486400" cy="4114800"/>
+          </a:xfrm>
+          <a:prstGeom prst="rect">
+            <a:avLst/>
+          </a:prstGeom>
+        </p:spPr>
+        <p:txBody>
+          <a:bodyPr anchorCtr="0" anchor="t" bIns="91425" lIns="91425" spcFirstLastPara="1" rIns="91425" wrap="square" tIns="91425">
+            <a:noAutofit/>
+          </a:bodyPr>
+          <a:lstStyle/>
+          <a:p>
+            <a:pPr indent="0" lvl="0" marL="0" rtl="0" algn="l">
+              <a:spcBef>
+                <a:spcPts val="0"/>
+              </a:spcBef>
+              <a:spcAft>
+                <a:spcPts val="0"/>
+              </a:spcAft>
+              <a:buNone/>
+            </a:pPr>
+            <a:r>
+              <a:t/>
+            </a:r>
+            <a:endParaRPr/>
+          </a:p>
+        </p:txBody>
+      </p:sp>
+    </p:spTree>
+  </p:cSld>
+  <p:clrMapOvr>
+    <a:masterClrMapping/>
+  </p:clrMapOvr>
+</p:notes>
+</file>
+
+<file path=ppt/notesSlides/notesSlide9.xml><?xml version="1.0" encoding="utf-8"?>
+<p:notes xmlns:a="http://schemas.openxmlformats.org/drawingml/2006/main" xmlns:r="http://schemas.openxmlformats.org/officeDocument/2006/relationships" xmlns:mc="http://schemas.openxmlformats.org/markup-compatibility/2006" xmlns:mv="urn:schemas-microsoft-com:mac:vml" xmlns:p="http://schemas.openxmlformats.org/presentationml/2006/main" xmlns:c="http://schemas.openxmlformats.org/drawingml/2006/chart" xmlns:dgm="http://schemas.openxmlformats.org/drawingml/2006/diagram" xmlns:o="urn:schemas-microsoft-com:office:office" xmlns:v="urn:schemas-microsoft-com:vml" xmlns:pvml="urn:schemas-microsoft-com:office:powerpoint" xmlns:com="http://schemas.openxmlformats.org/drawingml/2006/compatibility" xmlns:p14="http://schemas.microsoft.com/office/powerpoint/2010/main" xmlns:p15="http://schemas.microsoft.com/office/powerpoint/2012/main" xmlns:ahyp="http://schemas.microsoft.com/office/drawing/2018/hyperlinkcolor" showMasterPhAnim="0" showMasterSp="0">
+  <p:cSld>
+    <p:spTree>
+      <p:nvGrpSpPr>
+        <p:cNvPr id="105" name="Shape 105"/>
+        <p:cNvGrpSpPr/>
+        <p:nvPr/>
+      </p:nvGrpSpPr>
+      <p:grpSpPr>
+        <a:xfrm>
+          <a:off x="0" y="0"/>
+          <a:ext cx="0" cy="0"/>
+          <a:chOff x="0" y="0"/>
+          <a:chExt cx="0" cy="0"/>
+        </a:xfrm>
+      </p:grpSpPr>
+      <p:sp>
+        <p:nvSpPr>
+          <p:cNvPr id="106" name="Google Shape;106;h470167a17a141f5f_0_10:notes"/>
+          <p:cNvSpPr/>
+          <p:nvPr>
+            <p:ph idx="2" type="sldImg"/>
+          </p:nvPr>
+        </p:nvSpPr>
+        <p:spPr>
+          <a:xfrm>
+            <a:off x="381300" y="685800"/>
+            <a:ext cx="6096000" cy="3429000"/>
+          </a:xfrm>
+          <a:custGeom>
+            <a:rect b="b" l="l" r="r" t="t"/>
+            <a:pathLst>
+              <a:path extrusionOk="0" h="120000" w="120000">
+                <a:moveTo>
+                  <a:pt x="0" y="0"/>
+                </a:moveTo>
+                <a:lnTo>
+                  <a:pt x="120000" y="0"/>
+                </a:lnTo>
+                <a:lnTo>
+                  <a:pt x="120000" y="120000"/>
+                </a:lnTo>
+                <a:lnTo>
+                  <a:pt x="0" y="120000"/>
+                </a:lnTo>
+                <a:close/>
+              </a:path>
+            </a:pathLst>
+          </a:custGeom>
+        </p:spPr>
+      </p:sp>
+      <p:sp>
+        <p:nvSpPr>
+          <p:cNvPr id="107" name="Google Shape;107;h470167a17a141f5f_0_10:notes"/>
           <p:cNvSpPr txBox="1"/>
           <p:nvPr>
             <p:ph idx="1" type="body"/>
@@ -6267,6 +6911,1754 @@
 </p:sld>
 </file>
 
+<file path=ppt/slides/slide10.xml><?xml version="1.0" encoding="utf-8"?>
+<p:sld xmlns:a="http://schemas.openxmlformats.org/drawingml/2006/main" xmlns:r="http://schemas.openxmlformats.org/officeDocument/2006/relationships" xmlns:mc="http://schemas.openxmlformats.org/markup-compatibility/2006" xmlns:mv="urn:schemas-microsoft-com:mac:vml" xmlns:p="http://schemas.openxmlformats.org/presentationml/2006/main" xmlns:c="http://schemas.openxmlformats.org/drawingml/2006/chart" xmlns:dgm="http://schemas.openxmlformats.org/drawingml/2006/diagram" xmlns:o="urn:schemas-microsoft-com:office:office" xmlns:v="urn:schemas-microsoft-com:vml" xmlns:pvml="urn:schemas-microsoft-com:office:powerpoint" xmlns:com="http://schemas.openxmlformats.org/drawingml/2006/compatibility" xmlns:p14="http://schemas.microsoft.com/office/powerpoint/2010/main" xmlns:p15="http://schemas.microsoft.com/office/powerpoint/2012/main" xmlns:ahyp="http://schemas.microsoft.com/office/drawing/2018/hyperlinkcolor">
+  <p:cSld>
+    <p:spTree>
+      <p:nvGrpSpPr>
+        <p:cNvPr id="114" name="Shape 114"/>
+        <p:cNvGrpSpPr/>
+        <p:nvPr/>
+      </p:nvGrpSpPr>
+      <p:grpSpPr>
+        <a:xfrm>
+          <a:off x="0" y="0"/>
+          <a:ext cx="0" cy="0"/>
+          <a:chOff x="0" y="0"/>
+          <a:chExt cx="0" cy="0"/>
+        </a:xfrm>
+      </p:grpSpPr>
+      <p:sp>
+        <p:nvSpPr>
+          <p:cNvPr id="115" name="Google Shape;115;p22"/>
+          <p:cNvSpPr txBox="1"/>
+          <p:nvPr>
+            <p:ph type="title"/>
+          </p:nvPr>
+        </p:nvSpPr>
+        <p:spPr>
+          <a:xfrm>
+            <a:off x="311700" y="445025"/>
+            <a:ext cx="8520600" cy="572700"/>
+          </a:xfrm>
+          <a:prstGeom prst="rect">
+            <a:avLst/>
+          </a:prstGeom>
+        </p:spPr>
+        <p:txBody>
+          <a:bodyPr anchorCtr="0" anchor="t" bIns="91425" lIns="91425" spcFirstLastPara="1" rIns="91425" wrap="square" tIns="91425">
+            <a:normAutofit fontScale="90000"/>
+          </a:bodyPr>
+          <a:lstStyle/>
+          <a:p>
+            <a:pPr indent="0" lvl="0" marL="0" rtl="0" algn="l">
+              <a:spcBef>
+                <a:spcPts val="0"/>
+              </a:spcBef>
+              <a:spcAft>
+                <a:spcPts val="0"/>
+              </a:spcAft>
+              <a:buClr>
+                <a:schemeClr val="dk1"/>
+              </a:buClr>
+              <a:buSzPct val="39286"/>
+              <a:buFont typeface="Arial"/>
+              <a:buNone/>
+            </a:pPr>
+            <a:r>
+              <a:rPr lang="en"/>
+              <a:t>Multiprocessor Scheduling with Work Stealing </a:t>
+            </a:r>
+            <a:endParaRPr/>
+          </a:p>
+          <a:p>
+            <a:pPr indent="0" lvl="0" marL="0" rtl="0" algn="l">
+              <a:spcBef>
+                <a:spcPts val="0"/>
+              </a:spcBef>
+              <a:spcAft>
+                <a:spcPts val="0"/>
+              </a:spcAft>
+              <a:buClr>
+                <a:schemeClr val="dk1"/>
+              </a:buClr>
+              <a:buSzPct val="39286"/>
+              <a:buFont typeface="Arial"/>
+              <a:buNone/>
+            </a:pPr>
+            <a:r>
+              <a:t/>
+            </a:r>
+            <a:endParaRPr/>
+          </a:p>
+          <a:p>
+            <a:pPr indent="0" lvl="0" marL="0" rtl="0" algn="l">
+              <a:spcBef>
+                <a:spcPts val="0"/>
+              </a:spcBef>
+              <a:spcAft>
+                <a:spcPts val="0"/>
+              </a:spcAft>
+              <a:buNone/>
+            </a:pPr>
+            <a:r>
+              <a:t/>
+            </a:r>
+            <a:endParaRPr/>
+          </a:p>
+        </p:txBody>
+      </p:sp>
+      <p:sp>
+        <p:nvSpPr>
+          <p:cNvPr id="116" name="Google Shape;116;p22"/>
+          <p:cNvSpPr txBox="1"/>
+          <p:nvPr>
+            <p:ph idx="1" type="body"/>
+          </p:nvPr>
+        </p:nvSpPr>
+        <p:spPr>
+          <a:xfrm>
+            <a:off x="311700" y="1152475"/>
+            <a:ext cx="8520600" cy="3416400"/>
+          </a:xfrm>
+          <a:prstGeom prst="rect">
+            <a:avLst/>
+          </a:prstGeom>
+        </p:spPr>
+        <p:txBody>
+          <a:bodyPr anchorCtr="0" anchor="t" bIns="91425" lIns="91425" spcFirstLastPara="1" rIns="91425" wrap="square" tIns="91425">
+            <a:normAutofit fontScale="85000" lnSpcReduction="20000"/>
+          </a:bodyPr>
+          <a:lstStyle/>
+          <a:p>
+            <a:pPr indent="0" lvl="0" marL="0" rtl="0" algn="l">
+              <a:spcBef>
+                <a:spcPts val="0"/>
+              </a:spcBef>
+              <a:spcAft>
+                <a:spcPts val="0"/>
+              </a:spcAft>
+              <a:buClr>
+                <a:schemeClr val="dk1"/>
+              </a:buClr>
+              <a:buSzPct val="54046"/>
+              <a:buFont typeface="Arial"/>
+              <a:buNone/>
+            </a:pPr>
+            <a:r>
+              <a:rPr b="1" lang="en" sz="2035"/>
+              <a:t>Requirements: </a:t>
+            </a:r>
+            <a:endParaRPr b="1" sz="2035"/>
+          </a:p>
+          <a:p>
+            <a:pPr indent="0" lvl="0" marL="0" rtl="0" algn="l">
+              <a:spcBef>
+                <a:spcPts val="1200"/>
+              </a:spcBef>
+              <a:spcAft>
+                <a:spcPts val="0"/>
+              </a:spcAft>
+              <a:buClr>
+                <a:schemeClr val="dk1"/>
+              </a:buClr>
+              <a:buSzPct val="61111"/>
+              <a:buFont typeface="Arial"/>
+              <a:buNone/>
+            </a:pPr>
+            <a:r>
+              <a:rPr lang="en"/>
+              <a:t>Implement a multiprocessor CPU scheduling simulation.</a:t>
+            </a:r>
+            <a:endParaRPr/>
+          </a:p>
+          <a:p>
+            <a:pPr indent="0" lvl="0" marL="0" rtl="0" algn="l">
+              <a:spcBef>
+                <a:spcPts val="1200"/>
+              </a:spcBef>
+              <a:spcAft>
+                <a:spcPts val="0"/>
+              </a:spcAft>
+              <a:buClr>
+                <a:schemeClr val="dk1"/>
+              </a:buClr>
+              <a:buSzPct val="61111"/>
+              <a:buFont typeface="Arial"/>
+              <a:buNone/>
+            </a:pPr>
+            <a:r>
+              <a:rPr lang="en"/>
+              <a:t>Manage processes across multiple CPUs.</a:t>
+            </a:r>
+            <a:endParaRPr/>
+          </a:p>
+          <a:p>
+            <a:pPr indent="0" lvl="0" marL="0" rtl="0" algn="l">
+              <a:spcBef>
+                <a:spcPts val="1200"/>
+              </a:spcBef>
+              <a:spcAft>
+                <a:spcPts val="0"/>
+              </a:spcAft>
+              <a:buClr>
+                <a:schemeClr val="dk1"/>
+              </a:buClr>
+              <a:buSzPct val="61111"/>
+              <a:buFont typeface="Arial"/>
+              <a:buNone/>
+            </a:pPr>
+            <a:r>
+              <a:rPr lang="en"/>
+              <a:t>Maintain scheduling queues for each CPU.</a:t>
+            </a:r>
+            <a:endParaRPr/>
+          </a:p>
+          <a:p>
+            <a:pPr indent="0" lvl="0" marL="0" rtl="0" algn="l">
+              <a:spcBef>
+                <a:spcPts val="1200"/>
+              </a:spcBef>
+              <a:spcAft>
+                <a:spcPts val="0"/>
+              </a:spcAft>
+              <a:buClr>
+                <a:schemeClr val="dk1"/>
+              </a:buClr>
+              <a:buSzPct val="61111"/>
+              <a:buFont typeface="Arial"/>
+              <a:buNone/>
+            </a:pPr>
+            <a:r>
+              <a:rPr lang="en"/>
+              <a:t>Implement work stealing to balance workloads.</a:t>
+            </a:r>
+            <a:endParaRPr/>
+          </a:p>
+          <a:p>
+            <a:pPr indent="0" lvl="0" marL="0" rtl="0" algn="l">
+              <a:spcBef>
+                <a:spcPts val="1200"/>
+              </a:spcBef>
+              <a:spcAft>
+                <a:spcPts val="0"/>
+              </a:spcAft>
+              <a:buClr>
+                <a:schemeClr val="dk1"/>
+              </a:buClr>
+              <a:buSzPct val="61111"/>
+              <a:buFont typeface="Arial"/>
+              <a:buNone/>
+            </a:pPr>
+            <a:r>
+              <a:rPr lang="en"/>
+              <a:t>Track process execution and completion.</a:t>
+            </a:r>
+            <a:endParaRPr/>
+          </a:p>
+          <a:p>
+            <a:pPr indent="0" lvl="0" marL="0" rtl="0" algn="l">
+              <a:spcBef>
+                <a:spcPts val="1200"/>
+              </a:spcBef>
+              <a:spcAft>
+                <a:spcPts val="0"/>
+              </a:spcAft>
+              <a:buClr>
+                <a:schemeClr val="dk1"/>
+              </a:buClr>
+              <a:buSzPct val="65385"/>
+              <a:buFont typeface="Arial"/>
+              <a:buNone/>
+            </a:pPr>
+            <a:r>
+              <a:rPr b="1" lang="en" sz="1682"/>
+              <a:t>Goal: Improve CPU utilization by allowing idle processors to take work from busy processors.</a:t>
+            </a:r>
+            <a:endParaRPr b="1" sz="1682"/>
+          </a:p>
+          <a:p>
+            <a:pPr indent="0" lvl="0" marL="0" rtl="0" algn="l">
+              <a:spcBef>
+                <a:spcPts val="1200"/>
+              </a:spcBef>
+              <a:spcAft>
+                <a:spcPts val="0"/>
+              </a:spcAft>
+              <a:buClr>
+                <a:schemeClr val="dk1"/>
+              </a:buClr>
+              <a:buSzPct val="61111"/>
+              <a:buFont typeface="Arial"/>
+              <a:buNone/>
+            </a:pPr>
+            <a:r>
+              <a:t/>
+            </a:r>
+            <a:endParaRPr/>
+          </a:p>
+          <a:p>
+            <a:pPr indent="0" lvl="0" marL="0" rtl="0" algn="l">
+              <a:spcBef>
+                <a:spcPts val="1200"/>
+              </a:spcBef>
+              <a:spcAft>
+                <a:spcPts val="1200"/>
+              </a:spcAft>
+              <a:buNone/>
+            </a:pPr>
+            <a:r>
+              <a:t/>
+            </a:r>
+            <a:endParaRPr/>
+          </a:p>
+        </p:txBody>
+      </p:sp>
+    </p:spTree>
+  </p:cSld>
+  <p:clrMapOvr>
+    <a:masterClrMapping/>
+  </p:clrMapOvr>
+</p:sld>
+</file>
+
+<file path=ppt/slides/slide11.xml><?xml version="1.0" encoding="utf-8"?>
+<p:sld xmlns:a="http://schemas.openxmlformats.org/drawingml/2006/main" xmlns:r="http://schemas.openxmlformats.org/officeDocument/2006/relationships" xmlns:mc="http://schemas.openxmlformats.org/markup-compatibility/2006" xmlns:mv="urn:schemas-microsoft-com:mac:vml" xmlns:p="http://schemas.openxmlformats.org/presentationml/2006/main" xmlns:c="http://schemas.openxmlformats.org/drawingml/2006/chart" xmlns:dgm="http://schemas.openxmlformats.org/drawingml/2006/diagram" xmlns:o="urn:schemas-microsoft-com:office:office" xmlns:v="urn:schemas-microsoft-com:vml" xmlns:pvml="urn:schemas-microsoft-com:office:powerpoint" xmlns:com="http://schemas.openxmlformats.org/drawingml/2006/compatibility" xmlns:p14="http://schemas.microsoft.com/office/powerpoint/2010/main" xmlns:p15="http://schemas.microsoft.com/office/powerpoint/2012/main" xmlns:ahyp="http://schemas.microsoft.com/office/drawing/2018/hyperlinkcolor">
+  <p:cSld>
+    <p:spTree>
+      <p:nvGrpSpPr>
+        <p:cNvPr id="120" name="Shape 120"/>
+        <p:cNvGrpSpPr/>
+        <p:nvPr/>
+      </p:nvGrpSpPr>
+      <p:grpSpPr>
+        <a:xfrm>
+          <a:off x="0" y="0"/>
+          <a:ext cx="0" cy="0"/>
+          <a:chOff x="0" y="0"/>
+          <a:chExt cx="0" cy="0"/>
+        </a:xfrm>
+      </p:grpSpPr>
+      <p:sp>
+        <p:nvSpPr>
+          <p:cNvPr id="121" name="Google Shape;121;p23"/>
+          <p:cNvSpPr txBox="1"/>
+          <p:nvPr>
+            <p:ph type="title"/>
+          </p:nvPr>
+        </p:nvSpPr>
+        <p:spPr>
+          <a:xfrm>
+            <a:off x="311700" y="445025"/>
+            <a:ext cx="8520600" cy="572700"/>
+          </a:xfrm>
+          <a:prstGeom prst="rect">
+            <a:avLst/>
+          </a:prstGeom>
+        </p:spPr>
+        <p:txBody>
+          <a:bodyPr anchorCtr="0" anchor="t" bIns="91425" lIns="91425" spcFirstLastPara="1" rIns="91425" wrap="square" tIns="91425">
+            <a:normAutofit fontScale="90000"/>
+          </a:bodyPr>
+          <a:lstStyle/>
+          <a:p>
+            <a:pPr indent="0" lvl="0" marL="0" rtl="0" algn="l">
+              <a:spcBef>
+                <a:spcPts val="0"/>
+              </a:spcBef>
+              <a:spcAft>
+                <a:spcPts val="0"/>
+              </a:spcAft>
+              <a:buClr>
+                <a:schemeClr val="dk1"/>
+              </a:buClr>
+              <a:buSzPct val="39286"/>
+              <a:buFont typeface="Arial"/>
+              <a:buNone/>
+            </a:pPr>
+            <a:r>
+              <a:rPr lang="en"/>
+              <a:t>Challenges</a:t>
+            </a:r>
+            <a:endParaRPr/>
+          </a:p>
+          <a:p>
+            <a:pPr indent="0" lvl="0" marL="0" rtl="0" algn="l">
+              <a:spcBef>
+                <a:spcPts val="0"/>
+              </a:spcBef>
+              <a:spcAft>
+                <a:spcPts val="0"/>
+              </a:spcAft>
+              <a:buClr>
+                <a:schemeClr val="dk1"/>
+              </a:buClr>
+              <a:buSzPct val="39286"/>
+              <a:buFont typeface="Arial"/>
+              <a:buNone/>
+            </a:pPr>
+            <a:r>
+              <a:t/>
+            </a:r>
+            <a:endParaRPr/>
+          </a:p>
+          <a:p>
+            <a:pPr indent="0" lvl="0" marL="0" rtl="0" algn="l">
+              <a:spcBef>
+                <a:spcPts val="0"/>
+              </a:spcBef>
+              <a:spcAft>
+                <a:spcPts val="0"/>
+              </a:spcAft>
+              <a:buNone/>
+            </a:pPr>
+            <a:r>
+              <a:t/>
+            </a:r>
+            <a:endParaRPr/>
+          </a:p>
+        </p:txBody>
+      </p:sp>
+      <p:sp>
+        <p:nvSpPr>
+          <p:cNvPr id="122" name="Google Shape;122;p23"/>
+          <p:cNvSpPr txBox="1"/>
+          <p:nvPr>
+            <p:ph idx="1" type="body"/>
+          </p:nvPr>
+        </p:nvSpPr>
+        <p:spPr>
+          <a:xfrm>
+            <a:off x="623400" y="1093325"/>
+            <a:ext cx="8520600" cy="3416400"/>
+          </a:xfrm>
+          <a:prstGeom prst="rect">
+            <a:avLst/>
+          </a:prstGeom>
+        </p:spPr>
+        <p:txBody>
+          <a:bodyPr anchorCtr="0" anchor="t" bIns="91425" lIns="91425" spcFirstLastPara="1" rIns="91425" wrap="square" tIns="91425">
+            <a:normAutofit fontScale="77500" lnSpcReduction="10000"/>
+          </a:bodyPr>
+          <a:lstStyle/>
+          <a:p>
+            <a:pPr indent="0" lvl="0" marL="0" rtl="0" algn="l">
+              <a:spcBef>
+                <a:spcPts val="0"/>
+              </a:spcBef>
+              <a:spcAft>
+                <a:spcPts val="0"/>
+              </a:spcAft>
+              <a:buClr>
+                <a:schemeClr val="dk1"/>
+              </a:buClr>
+              <a:buSzPct val="61111"/>
+              <a:buFont typeface="Arial"/>
+              <a:buNone/>
+            </a:pPr>
+            <a:r>
+              <a:t/>
+            </a:r>
+            <a:endParaRPr/>
+          </a:p>
+          <a:p>
+            <a:pPr indent="0" lvl="0" marL="0" rtl="0" algn="l">
+              <a:spcBef>
+                <a:spcPts val="1200"/>
+              </a:spcBef>
+              <a:spcAft>
+                <a:spcPts val="0"/>
+              </a:spcAft>
+              <a:buClr>
+                <a:schemeClr val="dk1"/>
+              </a:buClr>
+              <a:buSzPct val="61111"/>
+              <a:buFont typeface="Arial"/>
+              <a:buNone/>
+            </a:pPr>
+            <a:r>
+              <a:rPr lang="en"/>
+              <a:t>Managing multiple CPU queues simultaneously.</a:t>
+            </a:r>
+            <a:endParaRPr/>
+          </a:p>
+          <a:p>
+            <a:pPr indent="0" lvl="0" marL="0" rtl="0" algn="l">
+              <a:spcBef>
+                <a:spcPts val="1200"/>
+              </a:spcBef>
+              <a:spcAft>
+                <a:spcPts val="0"/>
+              </a:spcAft>
+              <a:buClr>
+                <a:schemeClr val="dk1"/>
+              </a:buClr>
+              <a:buSzPct val="61111"/>
+              <a:buFont typeface="Arial"/>
+              <a:buNone/>
+            </a:pPr>
+            <a:r>
+              <a:rPr lang="en"/>
+              <a:t>Keeping track of processes assigned to each CPU.</a:t>
+            </a:r>
+            <a:endParaRPr/>
+          </a:p>
+          <a:p>
+            <a:pPr indent="0" lvl="0" marL="0" rtl="0" algn="l">
+              <a:spcBef>
+                <a:spcPts val="1200"/>
+              </a:spcBef>
+              <a:spcAft>
+                <a:spcPts val="0"/>
+              </a:spcAft>
+              <a:buClr>
+                <a:schemeClr val="dk1"/>
+              </a:buClr>
+              <a:buSzPct val="61111"/>
+              <a:buFont typeface="Arial"/>
+              <a:buNone/>
+            </a:pPr>
+            <a:r>
+              <a:rPr lang="en"/>
+              <a:t>Determining when an idle CPU should steal work.</a:t>
+            </a:r>
+            <a:endParaRPr/>
+          </a:p>
+          <a:p>
+            <a:pPr indent="0" lvl="0" marL="0" rtl="0" algn="l">
+              <a:spcBef>
+                <a:spcPts val="1200"/>
+              </a:spcBef>
+              <a:spcAft>
+                <a:spcPts val="0"/>
+              </a:spcAft>
+              <a:buClr>
+                <a:schemeClr val="dk1"/>
+              </a:buClr>
+              <a:buSzPct val="61111"/>
+              <a:buFont typeface="Arial"/>
+              <a:buNone/>
+            </a:pPr>
+            <a:r>
+              <a:rPr lang="en"/>
+              <a:t>Preventing incorrect process execution or duplication.</a:t>
+            </a:r>
+            <a:endParaRPr/>
+          </a:p>
+          <a:p>
+            <a:pPr indent="0" lvl="0" marL="0" rtl="0" algn="l">
+              <a:spcBef>
+                <a:spcPts val="1200"/>
+              </a:spcBef>
+              <a:spcAft>
+                <a:spcPts val="0"/>
+              </a:spcAft>
+              <a:buClr>
+                <a:schemeClr val="dk1"/>
+              </a:buClr>
+              <a:buSzPct val="61111"/>
+              <a:buFont typeface="Arial"/>
+              <a:buNone/>
+            </a:pPr>
+            <a:r>
+              <a:rPr lang="en"/>
+              <a:t>Maintaining accurate scheduling and completion times.</a:t>
+            </a:r>
+            <a:endParaRPr/>
+          </a:p>
+          <a:p>
+            <a:pPr indent="0" lvl="0" marL="0" rtl="0" algn="l">
+              <a:spcBef>
+                <a:spcPts val="1200"/>
+              </a:spcBef>
+              <a:spcAft>
+                <a:spcPts val="0"/>
+              </a:spcAft>
+              <a:buClr>
+                <a:schemeClr val="dk1"/>
+              </a:buClr>
+              <a:buSzPct val="61111"/>
+              <a:buFont typeface="Arial"/>
+              <a:buNone/>
+            </a:pPr>
+            <a:r>
+              <a:rPr b="1" lang="en"/>
+              <a:t>Biggest Challenge: </a:t>
+            </a:r>
+            <a:r>
+              <a:rPr lang="en"/>
+              <a:t>Coordinating process execution and workload balancing across multiple CPUs.</a:t>
+            </a:r>
+            <a:endParaRPr/>
+          </a:p>
+          <a:p>
+            <a:pPr indent="0" lvl="0" marL="0" rtl="0" algn="l">
+              <a:spcBef>
+                <a:spcPts val="1200"/>
+              </a:spcBef>
+              <a:spcAft>
+                <a:spcPts val="0"/>
+              </a:spcAft>
+              <a:buClr>
+                <a:schemeClr val="dk1"/>
+              </a:buClr>
+              <a:buSzPct val="61111"/>
+              <a:buFont typeface="Arial"/>
+              <a:buNone/>
+            </a:pPr>
+            <a:r>
+              <a:t/>
+            </a:r>
+            <a:endParaRPr/>
+          </a:p>
+          <a:p>
+            <a:pPr indent="0" lvl="0" marL="0" rtl="0" algn="l">
+              <a:spcBef>
+                <a:spcPts val="1200"/>
+              </a:spcBef>
+              <a:spcAft>
+                <a:spcPts val="1200"/>
+              </a:spcAft>
+              <a:buNone/>
+            </a:pPr>
+            <a:r>
+              <a:t/>
+            </a:r>
+            <a:endParaRPr/>
+          </a:p>
+        </p:txBody>
+      </p:sp>
+    </p:spTree>
+  </p:cSld>
+  <p:clrMapOvr>
+    <a:masterClrMapping/>
+  </p:clrMapOvr>
+</p:sld>
+</file>
+
+<file path=ppt/slides/slide12.xml><?xml version="1.0" encoding="utf-8"?>
+<p:sld xmlns:a="http://schemas.openxmlformats.org/drawingml/2006/main" xmlns:r="http://schemas.openxmlformats.org/officeDocument/2006/relationships" xmlns:mc="http://schemas.openxmlformats.org/markup-compatibility/2006" xmlns:mv="urn:schemas-microsoft-com:mac:vml" xmlns:p="http://schemas.openxmlformats.org/presentationml/2006/main" xmlns:c="http://schemas.openxmlformats.org/drawingml/2006/chart" xmlns:dgm="http://schemas.openxmlformats.org/drawingml/2006/diagram" xmlns:o="urn:schemas-microsoft-com:office:office" xmlns:v="urn:schemas-microsoft-com:vml" xmlns:pvml="urn:schemas-microsoft-com:office:powerpoint" xmlns:com="http://schemas.openxmlformats.org/drawingml/2006/compatibility" xmlns:p14="http://schemas.microsoft.com/office/powerpoint/2010/main" xmlns:p15="http://schemas.microsoft.com/office/powerpoint/2012/main" xmlns:ahyp="http://schemas.microsoft.com/office/drawing/2018/hyperlinkcolor">
+  <p:cSld>
+    <p:spTree>
+      <p:nvGrpSpPr>
+        <p:cNvPr id="126" name="Shape 126"/>
+        <p:cNvGrpSpPr/>
+        <p:nvPr/>
+      </p:nvGrpSpPr>
+      <p:grpSpPr>
+        <a:xfrm>
+          <a:off x="0" y="0"/>
+          <a:ext cx="0" cy="0"/>
+          <a:chOff x="0" y="0"/>
+          <a:chExt cx="0" cy="0"/>
+        </a:xfrm>
+      </p:grpSpPr>
+      <p:sp>
+        <p:nvSpPr>
+          <p:cNvPr id="127" name="Google Shape;127;p24"/>
+          <p:cNvSpPr txBox="1"/>
+          <p:nvPr>
+            <p:ph type="title"/>
+          </p:nvPr>
+        </p:nvSpPr>
+        <p:spPr>
+          <a:xfrm>
+            <a:off x="311700" y="445025"/>
+            <a:ext cx="8520600" cy="572700"/>
+          </a:xfrm>
+          <a:prstGeom prst="rect">
+            <a:avLst/>
+          </a:prstGeom>
+        </p:spPr>
+        <p:txBody>
+          <a:bodyPr anchorCtr="0" anchor="t" bIns="91425" lIns="91425" spcFirstLastPara="1" rIns="91425" wrap="square" tIns="91425">
+            <a:normAutofit fontScale="90000"/>
+          </a:bodyPr>
+          <a:lstStyle/>
+          <a:p>
+            <a:pPr indent="0" lvl="0" marL="0" rtl="0" algn="l">
+              <a:spcBef>
+                <a:spcPts val="0"/>
+              </a:spcBef>
+              <a:spcAft>
+                <a:spcPts val="0"/>
+              </a:spcAft>
+              <a:buClr>
+                <a:schemeClr val="dk1"/>
+              </a:buClr>
+              <a:buSzPct val="39286"/>
+              <a:buFont typeface="Arial"/>
+              <a:buNone/>
+            </a:pPr>
+            <a:r>
+              <a:rPr lang="en"/>
+              <a:t>Solutions</a:t>
+            </a:r>
+            <a:endParaRPr/>
+          </a:p>
+          <a:p>
+            <a:pPr indent="0" lvl="0" marL="0" rtl="0" algn="l">
+              <a:spcBef>
+                <a:spcPts val="0"/>
+              </a:spcBef>
+              <a:spcAft>
+                <a:spcPts val="0"/>
+              </a:spcAft>
+              <a:buClr>
+                <a:schemeClr val="dk1"/>
+              </a:buClr>
+              <a:buSzPct val="39286"/>
+              <a:buFont typeface="Arial"/>
+              <a:buNone/>
+            </a:pPr>
+            <a:r>
+              <a:t/>
+            </a:r>
+            <a:endParaRPr/>
+          </a:p>
+          <a:p>
+            <a:pPr indent="0" lvl="0" marL="0" rtl="0" algn="l">
+              <a:spcBef>
+                <a:spcPts val="0"/>
+              </a:spcBef>
+              <a:spcAft>
+                <a:spcPts val="0"/>
+              </a:spcAft>
+              <a:buNone/>
+            </a:pPr>
+            <a:r>
+              <a:t/>
+            </a:r>
+            <a:endParaRPr/>
+          </a:p>
+        </p:txBody>
+      </p:sp>
+      <p:sp>
+        <p:nvSpPr>
+          <p:cNvPr id="128" name="Google Shape;128;p24"/>
+          <p:cNvSpPr txBox="1"/>
+          <p:nvPr>
+            <p:ph idx="1" type="body"/>
+          </p:nvPr>
+        </p:nvSpPr>
+        <p:spPr>
+          <a:xfrm>
+            <a:off x="311700" y="1152475"/>
+            <a:ext cx="8520600" cy="3416400"/>
+          </a:xfrm>
+          <a:prstGeom prst="rect">
+            <a:avLst/>
+          </a:prstGeom>
+        </p:spPr>
+        <p:txBody>
+          <a:bodyPr anchorCtr="0" anchor="t" bIns="91425" lIns="91425" spcFirstLastPara="1" rIns="91425" wrap="square" tIns="91425">
+            <a:normAutofit fontScale="85000" lnSpcReduction="20000"/>
+          </a:bodyPr>
+          <a:lstStyle/>
+          <a:p>
+            <a:pPr indent="0" lvl="0" marL="0" rtl="0" algn="l">
+              <a:spcBef>
+                <a:spcPts val="0"/>
+              </a:spcBef>
+              <a:spcAft>
+                <a:spcPts val="0"/>
+              </a:spcAft>
+              <a:buClr>
+                <a:schemeClr val="dk1"/>
+              </a:buClr>
+              <a:buSzPct val="61111"/>
+              <a:buFont typeface="Arial"/>
+              <a:buNone/>
+            </a:pPr>
+            <a:r>
+              <a:rPr lang="en"/>
+              <a:t>Used C structs to store process and CPU information.</a:t>
+            </a:r>
+            <a:endParaRPr/>
+          </a:p>
+          <a:p>
+            <a:pPr indent="0" lvl="0" marL="0" rtl="0" algn="l">
+              <a:spcBef>
+                <a:spcPts val="1200"/>
+              </a:spcBef>
+              <a:spcAft>
+                <a:spcPts val="0"/>
+              </a:spcAft>
+              <a:buClr>
+                <a:schemeClr val="dk1"/>
+              </a:buClr>
+              <a:buSzPct val="61111"/>
+              <a:buFont typeface="Arial"/>
+              <a:buNone/>
+            </a:pPr>
+            <a:r>
+              <a:rPr lang="en"/>
+              <a:t>Assigned processes to CPUs using round-robin distribution.</a:t>
+            </a:r>
+            <a:endParaRPr/>
+          </a:p>
+          <a:p>
+            <a:pPr indent="0" lvl="0" marL="0" rtl="0" algn="l">
+              <a:spcBef>
+                <a:spcPts val="1200"/>
+              </a:spcBef>
+              <a:spcAft>
+                <a:spcPts val="0"/>
+              </a:spcAft>
+              <a:buClr>
+                <a:schemeClr val="dk1"/>
+              </a:buClr>
+              <a:buSzPct val="61111"/>
+              <a:buFont typeface="Arial"/>
+              <a:buNone/>
+            </a:pPr>
+            <a:r>
+              <a:rPr lang="en"/>
+              <a:t>Implemented First-Come, First-Served (FCFS) scheduling for each CPU queue.</a:t>
+            </a:r>
+            <a:endParaRPr/>
+          </a:p>
+          <a:p>
+            <a:pPr indent="0" lvl="0" marL="0" rtl="0" algn="l">
+              <a:spcBef>
+                <a:spcPts val="1200"/>
+              </a:spcBef>
+              <a:spcAft>
+                <a:spcPts val="0"/>
+              </a:spcAft>
+              <a:buClr>
+                <a:schemeClr val="dk1"/>
+              </a:buClr>
+              <a:buSzPct val="61111"/>
+              <a:buFont typeface="Arial"/>
+              <a:buNone/>
+            </a:pPr>
+            <a:r>
+              <a:rPr lang="en"/>
+              <a:t>Allowed idle CPUs to steal waiting processes from the busiest CPU queue.</a:t>
+            </a:r>
+            <a:endParaRPr/>
+          </a:p>
+          <a:p>
+            <a:pPr indent="0" lvl="0" marL="0" rtl="0" algn="l">
+              <a:spcBef>
+                <a:spcPts val="1200"/>
+              </a:spcBef>
+              <a:spcAft>
+                <a:spcPts val="0"/>
+              </a:spcAft>
+              <a:buClr>
+                <a:schemeClr val="dk1"/>
+              </a:buClr>
+              <a:buSzPct val="61111"/>
+              <a:buFont typeface="Arial"/>
+              <a:buNone/>
+            </a:pPr>
+            <a:r>
+              <a:rPr lang="en"/>
+              <a:t>Used a single-threaded simulation to manage scheduling events and track performance.</a:t>
+            </a:r>
+            <a:endParaRPr/>
+          </a:p>
+          <a:p>
+            <a:pPr indent="0" lvl="0" marL="0" rtl="0" algn="l">
+              <a:spcBef>
+                <a:spcPts val="1200"/>
+              </a:spcBef>
+              <a:spcAft>
+                <a:spcPts val="0"/>
+              </a:spcAft>
+              <a:buClr>
+                <a:schemeClr val="dk1"/>
+              </a:buClr>
+              <a:buSzPct val="61111"/>
+              <a:buFont typeface="Arial"/>
+              <a:buNone/>
+            </a:pPr>
+            <a:r>
+              <a:rPr b="1" lang="en"/>
+              <a:t>Approach: </a:t>
+            </a:r>
+            <a:r>
+              <a:rPr lang="en"/>
+              <a:t>Built the scheduling logic step by step and tested work stealing using different process inputs.</a:t>
+            </a:r>
+            <a:endParaRPr/>
+          </a:p>
+          <a:p>
+            <a:pPr indent="0" lvl="0" marL="0" rtl="0" algn="l">
+              <a:spcBef>
+                <a:spcPts val="1200"/>
+              </a:spcBef>
+              <a:spcAft>
+                <a:spcPts val="0"/>
+              </a:spcAft>
+              <a:buClr>
+                <a:schemeClr val="dk1"/>
+              </a:buClr>
+              <a:buSzPct val="61111"/>
+              <a:buFont typeface="Arial"/>
+              <a:buNone/>
+            </a:pPr>
+            <a:r>
+              <a:t/>
+            </a:r>
+            <a:endParaRPr/>
+          </a:p>
+          <a:p>
+            <a:pPr indent="0" lvl="0" marL="0" rtl="0" algn="l">
+              <a:spcBef>
+                <a:spcPts val="1200"/>
+              </a:spcBef>
+              <a:spcAft>
+                <a:spcPts val="1200"/>
+              </a:spcAft>
+              <a:buNone/>
+            </a:pPr>
+            <a:r>
+              <a:t/>
+            </a:r>
+            <a:endParaRPr/>
+          </a:p>
+        </p:txBody>
+      </p:sp>
+    </p:spTree>
+  </p:cSld>
+  <p:clrMapOvr>
+    <a:masterClrMapping/>
+  </p:clrMapOvr>
+</p:sld>
+</file>
+
+<file path=ppt/slides/slide13.xml><?xml version="1.0" encoding="utf-8"?>
+<p:sld xmlns:a="http://schemas.openxmlformats.org/drawingml/2006/main" xmlns:r="http://schemas.openxmlformats.org/officeDocument/2006/relationships" xmlns:mc="http://schemas.openxmlformats.org/markup-compatibility/2006" xmlns:mv="urn:schemas-microsoft-com:mac:vml" xmlns:p="http://schemas.openxmlformats.org/presentationml/2006/main" xmlns:c="http://schemas.openxmlformats.org/drawingml/2006/chart" xmlns:dgm="http://schemas.openxmlformats.org/drawingml/2006/diagram" xmlns:o="urn:schemas-microsoft-com:office:office" xmlns:v="urn:schemas-microsoft-com:vml" xmlns:pvml="urn:schemas-microsoft-com:office:powerpoint" xmlns:com="http://schemas.openxmlformats.org/drawingml/2006/compatibility" xmlns:p14="http://schemas.microsoft.com/office/powerpoint/2010/main" xmlns:p15="http://schemas.microsoft.com/office/powerpoint/2012/main" xmlns:ahyp="http://schemas.microsoft.com/office/drawing/2018/hyperlinkcolor">
+  <p:cSld>
+    <p:spTree>
+      <p:nvGrpSpPr>
+        <p:cNvPr id="132" name="Shape 132"/>
+        <p:cNvGrpSpPr/>
+        <p:nvPr/>
+      </p:nvGrpSpPr>
+      <p:grpSpPr>
+        <a:xfrm>
+          <a:off x="0" y="0"/>
+          <a:ext cx="0" cy="0"/>
+          <a:chOff x="0" y="0"/>
+          <a:chExt cx="0" cy="0"/>
+        </a:xfrm>
+      </p:grpSpPr>
+      <p:sp>
+        <p:nvSpPr>
+          <p:cNvPr id="133" name="Google Shape;133;p25"/>
+          <p:cNvSpPr txBox="1"/>
+          <p:nvPr>
+            <p:ph type="title"/>
+          </p:nvPr>
+        </p:nvSpPr>
+        <p:spPr>
+          <a:xfrm>
+            <a:off x="311700" y="445025"/>
+            <a:ext cx="8520600" cy="572700"/>
+          </a:xfrm>
+          <a:prstGeom prst="rect">
+            <a:avLst/>
+          </a:prstGeom>
+        </p:spPr>
+        <p:txBody>
+          <a:bodyPr anchorCtr="0" anchor="t" bIns="91425" lIns="91425" spcFirstLastPara="1" rIns="91425" wrap="square" tIns="91425">
+            <a:normAutofit fontScale="90000"/>
+          </a:bodyPr>
+          <a:lstStyle/>
+          <a:p>
+            <a:pPr indent="0" lvl="0" marL="0" rtl="0" algn="l">
+              <a:spcBef>
+                <a:spcPts val="0"/>
+              </a:spcBef>
+              <a:spcAft>
+                <a:spcPts val="0"/>
+              </a:spcAft>
+              <a:buClr>
+                <a:schemeClr val="dk1"/>
+              </a:buClr>
+              <a:buSzPct val="39286"/>
+              <a:buFont typeface="Arial"/>
+              <a:buNone/>
+            </a:pPr>
+            <a:r>
+              <a:rPr lang="en"/>
+              <a:t>Results</a:t>
+            </a:r>
+            <a:endParaRPr/>
+          </a:p>
+          <a:p>
+            <a:pPr indent="0" lvl="0" marL="0" rtl="0" algn="l">
+              <a:spcBef>
+                <a:spcPts val="0"/>
+              </a:spcBef>
+              <a:spcAft>
+                <a:spcPts val="0"/>
+              </a:spcAft>
+              <a:buClr>
+                <a:schemeClr val="dk1"/>
+              </a:buClr>
+              <a:buSzPct val="39286"/>
+              <a:buFont typeface="Arial"/>
+              <a:buNone/>
+            </a:pPr>
+            <a:r>
+              <a:t/>
+            </a:r>
+            <a:endParaRPr/>
+          </a:p>
+          <a:p>
+            <a:pPr indent="0" lvl="0" marL="0" rtl="0" algn="l">
+              <a:spcBef>
+                <a:spcPts val="0"/>
+              </a:spcBef>
+              <a:spcAft>
+                <a:spcPts val="0"/>
+              </a:spcAft>
+              <a:buNone/>
+            </a:pPr>
+            <a:r>
+              <a:t/>
+            </a:r>
+            <a:endParaRPr/>
+          </a:p>
+        </p:txBody>
+      </p:sp>
+      <p:sp>
+        <p:nvSpPr>
+          <p:cNvPr id="134" name="Google Shape;134;p25"/>
+          <p:cNvSpPr txBox="1"/>
+          <p:nvPr>
+            <p:ph idx="1" type="body"/>
+          </p:nvPr>
+        </p:nvSpPr>
+        <p:spPr>
+          <a:xfrm>
+            <a:off x="311700" y="1152475"/>
+            <a:ext cx="8520600" cy="3416400"/>
+          </a:xfrm>
+          <a:prstGeom prst="rect">
+            <a:avLst/>
+          </a:prstGeom>
+        </p:spPr>
+        <p:txBody>
+          <a:bodyPr anchorCtr="0" anchor="t" bIns="91425" lIns="91425" spcFirstLastPara="1" rIns="91425" wrap="square" tIns="91425">
+            <a:normAutofit fontScale="25000" lnSpcReduction="20000"/>
+          </a:bodyPr>
+          <a:lstStyle/>
+          <a:p>
+            <a:pPr indent="0" lvl="0" marL="0" rtl="0" algn="l">
+              <a:spcBef>
+                <a:spcPts val="0"/>
+              </a:spcBef>
+              <a:spcAft>
+                <a:spcPts val="0"/>
+              </a:spcAft>
+              <a:buClr>
+                <a:schemeClr val="dk1"/>
+              </a:buClr>
+              <a:buSzPct val="61111"/>
+              <a:buFont typeface="Arial"/>
+              <a:buNone/>
+            </a:pPr>
+            <a:r>
+              <a:t/>
+            </a:r>
+            <a:endParaRPr/>
+          </a:p>
+          <a:p>
+            <a:pPr indent="0" lvl="0" marL="0" rtl="0" algn="l">
+              <a:spcBef>
+                <a:spcPts val="1200"/>
+              </a:spcBef>
+              <a:spcAft>
+                <a:spcPts val="0"/>
+              </a:spcAft>
+              <a:buClr>
+                <a:schemeClr val="dk1"/>
+              </a:buClr>
+              <a:buSzPts val="275"/>
+              <a:buFont typeface="Arial"/>
+              <a:buNone/>
+            </a:pPr>
+            <a:r>
+              <a:rPr lang="en" sz="5000"/>
+              <a:t>Successfully simulated scheduling across 3 CPUs.</a:t>
+            </a:r>
+            <a:endParaRPr sz="5000"/>
+          </a:p>
+          <a:p>
+            <a:pPr indent="0" lvl="0" marL="0" rtl="0" algn="l">
+              <a:spcBef>
+                <a:spcPts val="1200"/>
+              </a:spcBef>
+              <a:spcAft>
+                <a:spcPts val="0"/>
+              </a:spcAft>
+              <a:buClr>
+                <a:schemeClr val="dk1"/>
+              </a:buClr>
+              <a:buSzPts val="275"/>
+              <a:buFont typeface="Arial"/>
+              <a:buNone/>
+            </a:pPr>
+            <a:r>
+              <a:rPr lang="en" sz="5000"/>
+              <a:t>Demonstrated work stealing when CPU 2 took Process 4 at time 7.</a:t>
+            </a:r>
+            <a:endParaRPr sz="5000"/>
+          </a:p>
+          <a:p>
+            <a:pPr indent="0" lvl="0" marL="0" rtl="0" algn="l">
+              <a:spcBef>
+                <a:spcPts val="1200"/>
+              </a:spcBef>
+              <a:spcAft>
+                <a:spcPts val="0"/>
+              </a:spcAft>
+              <a:buClr>
+                <a:schemeClr val="dk1"/>
+              </a:buClr>
+              <a:buSzPts val="275"/>
+              <a:buFont typeface="Arial"/>
+              <a:buNone/>
+            </a:pPr>
+            <a:r>
+              <a:rPr lang="en" sz="5000"/>
+              <a:t>Average waiting time: 1.60 units</a:t>
+            </a:r>
+            <a:endParaRPr sz="5000"/>
+          </a:p>
+          <a:p>
+            <a:pPr indent="0" lvl="0" marL="0" rtl="0" algn="l">
+              <a:spcBef>
+                <a:spcPts val="1200"/>
+              </a:spcBef>
+              <a:spcAft>
+                <a:spcPts val="0"/>
+              </a:spcAft>
+              <a:buClr>
+                <a:schemeClr val="dk1"/>
+              </a:buClr>
+              <a:buSzPts val="275"/>
+              <a:buFont typeface="Arial"/>
+              <a:buNone/>
+            </a:pPr>
+            <a:r>
+              <a:rPr lang="en" sz="5000"/>
+              <a:t>Average turnaround time: 7.40 units</a:t>
+            </a:r>
+            <a:endParaRPr sz="5000"/>
+          </a:p>
+          <a:p>
+            <a:pPr indent="0" lvl="0" marL="0" rtl="0" algn="l">
+              <a:spcBef>
+                <a:spcPts val="1200"/>
+              </a:spcBef>
+              <a:spcAft>
+                <a:spcPts val="0"/>
+              </a:spcAft>
+              <a:buClr>
+                <a:schemeClr val="dk1"/>
+              </a:buClr>
+              <a:buSzPts val="275"/>
+              <a:buFont typeface="Arial"/>
+              <a:buNone/>
+            </a:pPr>
+            <a:r>
+              <a:rPr lang="en" sz="5000"/>
+              <a:t>Successful steals: 1</a:t>
+            </a:r>
+            <a:endParaRPr sz="5000"/>
+          </a:p>
+          <a:p>
+            <a:pPr indent="0" lvl="0" marL="0" rtl="0" algn="l">
+              <a:spcBef>
+                <a:spcPts val="1200"/>
+              </a:spcBef>
+              <a:spcAft>
+                <a:spcPts val="0"/>
+              </a:spcAft>
+              <a:buClr>
+                <a:schemeClr val="dk1"/>
+              </a:buClr>
+              <a:buSzPts val="275"/>
+              <a:buFont typeface="Arial"/>
+              <a:buNone/>
+            </a:pPr>
+            <a:r>
+              <a:rPr lang="en" sz="5000"/>
+              <a:t>Unsuccessful steal attempts: 7</a:t>
+            </a:r>
+            <a:endParaRPr sz="5000"/>
+          </a:p>
+          <a:p>
+            <a:pPr indent="0" lvl="0" marL="0" rtl="0" algn="l">
+              <a:spcBef>
+                <a:spcPts val="1200"/>
+              </a:spcBef>
+              <a:spcAft>
+                <a:spcPts val="0"/>
+              </a:spcAft>
+              <a:buClr>
+                <a:schemeClr val="dk1"/>
+              </a:buClr>
+              <a:buSzPct val="61111"/>
+              <a:buFont typeface="Arial"/>
+              <a:buNone/>
+            </a:pPr>
+            <a:r>
+              <a:t/>
+            </a:r>
+            <a:endParaRPr/>
+          </a:p>
+          <a:p>
+            <a:pPr indent="0" lvl="0" marL="0" rtl="0" algn="l">
+              <a:spcBef>
+                <a:spcPts val="1200"/>
+              </a:spcBef>
+              <a:spcAft>
+                <a:spcPts val="0"/>
+              </a:spcAft>
+              <a:buClr>
+                <a:schemeClr val="dk1"/>
+              </a:buClr>
+              <a:buSzPct val="61111"/>
+              <a:buFont typeface="Arial"/>
+              <a:buNone/>
+            </a:pPr>
+            <a:r>
+              <a:t/>
+            </a:r>
+            <a:endParaRPr/>
+          </a:p>
+          <a:p>
+            <a:pPr indent="0" lvl="0" marL="0" rtl="0" algn="l">
+              <a:spcBef>
+                <a:spcPts val="1200"/>
+              </a:spcBef>
+              <a:spcAft>
+                <a:spcPts val="0"/>
+              </a:spcAft>
+              <a:buClr>
+                <a:schemeClr val="dk1"/>
+              </a:buClr>
+              <a:buSzPct val="61111"/>
+              <a:buFont typeface="Arial"/>
+              <a:buNone/>
+            </a:pPr>
+            <a:r>
+              <a:t/>
+            </a:r>
+            <a:endParaRPr/>
+          </a:p>
+          <a:p>
+            <a:pPr indent="0" lvl="0" marL="0" rtl="0" algn="l">
+              <a:spcBef>
+                <a:spcPts val="1200"/>
+              </a:spcBef>
+              <a:spcAft>
+                <a:spcPts val="0"/>
+              </a:spcAft>
+              <a:buClr>
+                <a:schemeClr val="dk1"/>
+              </a:buClr>
+              <a:buSzPct val="61111"/>
+              <a:buFont typeface="Arial"/>
+              <a:buNone/>
+            </a:pPr>
+            <a:r>
+              <a:t/>
+            </a:r>
+            <a:endParaRPr/>
+          </a:p>
+          <a:p>
+            <a:pPr indent="0" lvl="0" marL="0" rtl="0" algn="l">
+              <a:spcBef>
+                <a:spcPts val="1200"/>
+              </a:spcBef>
+              <a:spcAft>
+                <a:spcPts val="0"/>
+              </a:spcAft>
+              <a:buClr>
+                <a:schemeClr val="dk1"/>
+              </a:buClr>
+              <a:buSzPct val="61111"/>
+              <a:buFont typeface="Arial"/>
+              <a:buNone/>
+            </a:pPr>
+            <a:r>
+              <a:t/>
+            </a:r>
+            <a:endParaRPr/>
+          </a:p>
+          <a:p>
+            <a:pPr indent="0" lvl="0" marL="0" rtl="0" algn="l">
+              <a:spcBef>
+                <a:spcPts val="1200"/>
+              </a:spcBef>
+              <a:spcAft>
+                <a:spcPts val="0"/>
+              </a:spcAft>
+              <a:buClr>
+                <a:schemeClr val="dk1"/>
+              </a:buClr>
+              <a:buSzPct val="61111"/>
+              <a:buFont typeface="Arial"/>
+              <a:buNone/>
+            </a:pPr>
+            <a:r>
+              <a:t/>
+            </a:r>
+            <a:endParaRPr/>
+          </a:p>
+          <a:p>
+            <a:pPr indent="0" lvl="0" marL="0" rtl="0" algn="l">
+              <a:spcBef>
+                <a:spcPts val="1200"/>
+              </a:spcBef>
+              <a:spcAft>
+                <a:spcPts val="0"/>
+              </a:spcAft>
+              <a:buClr>
+                <a:schemeClr val="dk1"/>
+              </a:buClr>
+              <a:buSzPct val="61111"/>
+              <a:buFont typeface="Arial"/>
+              <a:buNone/>
+            </a:pPr>
+            <a:r>
+              <a:t/>
+            </a:r>
+            <a:endParaRPr/>
+          </a:p>
+          <a:p>
+            <a:pPr indent="0" lvl="0" marL="0" rtl="0" algn="l">
+              <a:spcBef>
+                <a:spcPts val="1200"/>
+              </a:spcBef>
+              <a:spcAft>
+                <a:spcPts val="0"/>
+              </a:spcAft>
+              <a:buClr>
+                <a:schemeClr val="dk1"/>
+              </a:buClr>
+              <a:buSzPct val="61111"/>
+              <a:buFont typeface="Arial"/>
+              <a:buNone/>
+            </a:pPr>
+            <a:r>
+              <a:rPr lang="en"/>
+              <a:t>Outcome: Demonstrated how work stealing can redistribute waiting processes across CPUs.</a:t>
+            </a:r>
+            <a:endParaRPr/>
+          </a:p>
+          <a:p>
+            <a:pPr indent="0" lvl="0" marL="0" rtl="0" algn="l">
+              <a:spcBef>
+                <a:spcPts val="1200"/>
+              </a:spcBef>
+              <a:spcAft>
+                <a:spcPts val="0"/>
+              </a:spcAft>
+              <a:buClr>
+                <a:schemeClr val="dk1"/>
+              </a:buClr>
+              <a:buSzPct val="61111"/>
+              <a:buFont typeface="Arial"/>
+              <a:buNone/>
+            </a:pPr>
+            <a:r>
+              <a:t/>
+            </a:r>
+            <a:endParaRPr/>
+          </a:p>
+          <a:p>
+            <a:pPr indent="0" lvl="0" marL="0" rtl="0" algn="l">
+              <a:spcBef>
+                <a:spcPts val="1200"/>
+              </a:spcBef>
+              <a:spcAft>
+                <a:spcPts val="1200"/>
+              </a:spcAft>
+              <a:buNone/>
+            </a:pPr>
+            <a:r>
+              <a:t/>
+            </a:r>
+            <a:endParaRPr/>
+          </a:p>
+        </p:txBody>
+      </p:sp>
+      <p:sp>
+        <p:nvSpPr>
+          <p:cNvPr id="135" name="Google Shape;135;p25"/>
+          <p:cNvSpPr txBox="1"/>
+          <p:nvPr>
+            <p:ph idx="1" type="body"/>
+          </p:nvPr>
+        </p:nvSpPr>
+        <p:spPr>
+          <a:xfrm>
+            <a:off x="228175" y="1304875"/>
+            <a:ext cx="8756400" cy="3416400"/>
+          </a:xfrm>
+          <a:prstGeom prst="rect">
+            <a:avLst/>
+          </a:prstGeom>
+        </p:spPr>
+        <p:txBody>
+          <a:bodyPr anchorCtr="0" anchor="t" bIns="91425" lIns="91425" spcFirstLastPara="1" rIns="91425" wrap="square" tIns="91425">
+            <a:normAutofit fontScale="47500" lnSpcReduction="20000"/>
+          </a:bodyPr>
+          <a:lstStyle/>
+          <a:p>
+            <a:pPr indent="0" lvl="0" marL="0" rtl="0" algn="l">
+              <a:spcBef>
+                <a:spcPts val="0"/>
+              </a:spcBef>
+              <a:spcAft>
+                <a:spcPts val="0"/>
+              </a:spcAft>
+              <a:buNone/>
+            </a:pPr>
+            <a:r>
+              <a:t/>
+            </a:r>
+            <a:endParaRPr sz="5000"/>
+          </a:p>
+          <a:p>
+            <a:pPr indent="0" lvl="0" marL="0" rtl="0" algn="l">
+              <a:spcBef>
+                <a:spcPts val="1200"/>
+              </a:spcBef>
+              <a:spcAft>
+                <a:spcPts val="0"/>
+              </a:spcAft>
+              <a:buNone/>
+            </a:pPr>
+            <a:r>
+              <a:t/>
+            </a:r>
+            <a:endParaRPr/>
+          </a:p>
+          <a:p>
+            <a:pPr indent="0" lvl="0" marL="0" rtl="0" algn="l">
+              <a:spcBef>
+                <a:spcPts val="1200"/>
+              </a:spcBef>
+              <a:spcAft>
+                <a:spcPts val="0"/>
+              </a:spcAft>
+              <a:buNone/>
+            </a:pPr>
+            <a:r>
+              <a:t/>
+            </a:r>
+            <a:endParaRPr/>
+          </a:p>
+          <a:p>
+            <a:pPr indent="0" lvl="0" marL="0" rtl="0" algn="l">
+              <a:spcBef>
+                <a:spcPts val="1200"/>
+              </a:spcBef>
+              <a:spcAft>
+                <a:spcPts val="0"/>
+              </a:spcAft>
+              <a:buNone/>
+            </a:pPr>
+            <a:r>
+              <a:t/>
+            </a:r>
+            <a:endParaRPr/>
+          </a:p>
+          <a:p>
+            <a:pPr indent="0" lvl="0" marL="0" rtl="0" algn="l">
+              <a:spcBef>
+                <a:spcPts val="1200"/>
+              </a:spcBef>
+              <a:spcAft>
+                <a:spcPts val="0"/>
+              </a:spcAft>
+              <a:buNone/>
+            </a:pPr>
+            <a:r>
+              <a:t/>
+            </a:r>
+            <a:endParaRPr/>
+          </a:p>
+          <a:p>
+            <a:pPr indent="0" lvl="0" marL="0" rtl="0" algn="l">
+              <a:spcBef>
+                <a:spcPts val="1200"/>
+              </a:spcBef>
+              <a:spcAft>
+                <a:spcPts val="0"/>
+              </a:spcAft>
+              <a:buNone/>
+            </a:pPr>
+            <a:r>
+              <a:t/>
+            </a:r>
+            <a:endParaRPr/>
+          </a:p>
+          <a:p>
+            <a:pPr indent="0" lvl="0" marL="0" rtl="0" algn="l">
+              <a:spcBef>
+                <a:spcPts val="1200"/>
+              </a:spcBef>
+              <a:spcAft>
+                <a:spcPts val="0"/>
+              </a:spcAft>
+              <a:buNone/>
+            </a:pPr>
+            <a:r>
+              <a:t/>
+            </a:r>
+            <a:endParaRPr/>
+          </a:p>
+          <a:p>
+            <a:pPr indent="0" lvl="0" marL="0" rtl="0" algn="l">
+              <a:spcBef>
+                <a:spcPts val="1200"/>
+              </a:spcBef>
+              <a:spcAft>
+                <a:spcPts val="0"/>
+              </a:spcAft>
+              <a:buNone/>
+            </a:pPr>
+            <a:r>
+              <a:t/>
+            </a:r>
+            <a:endParaRPr/>
+          </a:p>
+          <a:p>
+            <a:pPr indent="0" lvl="0" marL="0" rtl="0" algn="l">
+              <a:spcBef>
+                <a:spcPts val="1200"/>
+              </a:spcBef>
+              <a:spcAft>
+                <a:spcPts val="0"/>
+              </a:spcAft>
+              <a:buNone/>
+            </a:pPr>
+            <a:r>
+              <a:rPr b="1" lang="en"/>
+              <a:t>Outcome: Demonstrated how work stealing can redistribute waiting processes across CPUs.</a:t>
+            </a:r>
+            <a:endParaRPr b="1"/>
+          </a:p>
+          <a:p>
+            <a:pPr indent="0" lvl="0" marL="0" rtl="0" algn="l">
+              <a:spcBef>
+                <a:spcPts val="1200"/>
+              </a:spcBef>
+              <a:spcAft>
+                <a:spcPts val="0"/>
+              </a:spcAft>
+              <a:buNone/>
+            </a:pPr>
+            <a:r>
+              <a:t/>
+            </a:r>
+            <a:endParaRPr/>
+          </a:p>
+          <a:p>
+            <a:pPr indent="0" lvl="0" marL="0" rtl="0" algn="l">
+              <a:spcBef>
+                <a:spcPts val="1200"/>
+              </a:spcBef>
+              <a:spcAft>
+                <a:spcPts val="1200"/>
+              </a:spcAft>
+              <a:buNone/>
+            </a:pPr>
+            <a:r>
+              <a:t/>
+            </a:r>
+            <a:endParaRPr/>
+          </a:p>
+        </p:txBody>
+      </p:sp>
+      <p:pic>
+        <p:nvPicPr>
+          <p:cNvPr id="136" name="Google Shape;136;p25" title="WhatsApp Image 2026-10-13 at 9.54.31 AM.jpeg"/>
+          <p:cNvPicPr preferRelativeResize="0"/>
+          <p:nvPr/>
+        </p:nvPicPr>
+        <p:blipFill>
+          <a:blip r:embed="rId3">
+            <a:alphaModFix/>
+          </a:blip>
+          <a:stretch>
+            <a:fillRect/>
+          </a:stretch>
+        </p:blipFill>
+        <p:spPr>
+          <a:xfrm>
+            <a:off x="5307251" y="752125"/>
+            <a:ext cx="3280524" cy="2612125"/>
+          </a:xfrm>
+          <a:prstGeom prst="rect">
+            <a:avLst/>
+          </a:prstGeom>
+          <a:noFill/>
+          <a:ln>
+            <a:noFill/>
+          </a:ln>
+        </p:spPr>
+      </p:pic>
+    </p:spTree>
+  </p:cSld>
+  <p:clrMapOvr>
+    <a:masterClrMapping/>
+  </p:clrMapOvr>
+</p:sld>
+</file>
+
+<file path=ppt/slides/slide14.xml><?xml version="1.0" encoding="utf-8"?>
+<p:sld xmlns:a="http://schemas.openxmlformats.org/drawingml/2006/main" xmlns:r="http://schemas.openxmlformats.org/officeDocument/2006/relationships" xmlns:mc="http://schemas.openxmlformats.org/markup-compatibility/2006" xmlns:mv="urn:schemas-microsoft-com:mac:vml" xmlns:p="http://schemas.openxmlformats.org/presentationml/2006/main" xmlns:c="http://schemas.openxmlformats.org/drawingml/2006/chart" xmlns:dgm="http://schemas.openxmlformats.org/drawingml/2006/diagram" xmlns:o="urn:schemas-microsoft-com:office:office" xmlns:v="urn:schemas-microsoft-com:vml" xmlns:pvml="urn:schemas-microsoft-com:office:powerpoint" xmlns:com="http://schemas.openxmlformats.org/drawingml/2006/compatibility" xmlns:p14="http://schemas.microsoft.com/office/powerpoint/2010/main" xmlns:p15="http://schemas.microsoft.com/office/powerpoint/2012/main" xmlns:ahyp="http://schemas.microsoft.com/office/drawing/2018/hyperlinkcolor">
+  <p:cSld>
+    <p:spTree>
+      <p:nvGrpSpPr>
+        <p:cNvPr id="140" name="Shape 140"/>
+        <p:cNvGrpSpPr/>
+        <p:nvPr/>
+      </p:nvGrpSpPr>
+      <p:grpSpPr>
+        <a:xfrm>
+          <a:off x="0" y="0"/>
+          <a:ext cx="0" cy="0"/>
+          <a:chOff x="0" y="0"/>
+          <a:chExt cx="0" cy="0"/>
+        </a:xfrm>
+      </p:grpSpPr>
+      <p:sp>
+        <p:nvSpPr>
+          <p:cNvPr id="141" name="Google Shape;141;p26"/>
+          <p:cNvSpPr txBox="1"/>
+          <p:nvPr>
+            <p:ph type="title"/>
+          </p:nvPr>
+        </p:nvSpPr>
+        <p:spPr>
+          <a:xfrm>
+            <a:off x="311700" y="445025"/>
+            <a:ext cx="8520600" cy="572700"/>
+          </a:xfrm>
+          <a:prstGeom prst="rect">
+            <a:avLst/>
+          </a:prstGeom>
+        </p:spPr>
+        <p:txBody>
+          <a:bodyPr anchorCtr="0" anchor="t" bIns="91425" lIns="91425" spcFirstLastPara="1" rIns="91425" wrap="square" tIns="91425">
+            <a:normAutofit fontScale="90000"/>
+          </a:bodyPr>
+          <a:lstStyle/>
+          <a:p>
+            <a:pPr indent="0" lvl="0" marL="0" rtl="0" algn="l">
+              <a:spcBef>
+                <a:spcPts val="0"/>
+              </a:spcBef>
+              <a:spcAft>
+                <a:spcPts val="0"/>
+              </a:spcAft>
+              <a:buNone/>
+            </a:pPr>
+            <a:r>
+              <a:rPr lang="en"/>
+              <a:t>Contribution	</a:t>
+            </a:r>
+            <a:endParaRPr/>
+          </a:p>
+        </p:txBody>
+      </p:sp>
+      <p:sp>
+        <p:nvSpPr>
+          <p:cNvPr id="142" name="Google Shape;142;p26"/>
+          <p:cNvSpPr txBox="1"/>
+          <p:nvPr>
+            <p:ph idx="1" type="body"/>
+          </p:nvPr>
+        </p:nvSpPr>
+        <p:spPr>
+          <a:xfrm>
+            <a:off x="311700" y="1152475"/>
+            <a:ext cx="8520600" cy="3416400"/>
+          </a:xfrm>
+          <a:prstGeom prst="rect">
+            <a:avLst/>
+          </a:prstGeom>
+        </p:spPr>
+        <p:txBody>
+          <a:bodyPr anchorCtr="0" anchor="t" bIns="91425" lIns="91425" spcFirstLastPara="1" rIns="91425" wrap="square" tIns="91425">
+            <a:normAutofit/>
+          </a:bodyPr>
+          <a:lstStyle/>
+          <a:p>
+            <a:pPr indent="-342900" lvl="0" marL="457200" rtl="0" algn="l">
+              <a:spcBef>
+                <a:spcPts val="0"/>
+              </a:spcBef>
+              <a:spcAft>
+                <a:spcPts val="0"/>
+              </a:spcAft>
+              <a:buSzPts val="1800"/>
+              <a:buChar char="●"/>
+            </a:pPr>
+            <a:r>
+              <a:rPr lang="en"/>
+              <a:t>Problem 1: Jordan Strine</a:t>
+            </a:r>
+            <a:endParaRPr/>
+          </a:p>
+          <a:p>
+            <a:pPr indent="-342900" lvl="0" marL="457200" rtl="0" algn="l">
+              <a:spcBef>
+                <a:spcPts val="0"/>
+              </a:spcBef>
+              <a:spcAft>
+                <a:spcPts val="0"/>
+              </a:spcAft>
+              <a:buSzPts val="1800"/>
+              <a:buChar char="●"/>
+            </a:pPr>
+            <a:r>
+              <a:rPr lang="en"/>
+              <a:t>Problem 2: Ngoc Lan Anh Nguyen</a:t>
+            </a:r>
+            <a:endParaRPr/>
+          </a:p>
+          <a:p>
+            <a:pPr indent="-342900" lvl="0" marL="457200" rtl="0" algn="l">
+              <a:spcBef>
+                <a:spcPts val="0"/>
+              </a:spcBef>
+              <a:spcAft>
+                <a:spcPts val="0"/>
+              </a:spcAft>
+              <a:buSzPts val="1800"/>
+              <a:buChar char="●"/>
+            </a:pPr>
+            <a:r>
+              <a:rPr lang="en"/>
+              <a:t>Problem 3: Amal Allas A Alqahtani</a:t>
+            </a:r>
+            <a:endParaRPr/>
+          </a:p>
+        </p:txBody>
+      </p:sp>
+    </p:spTree>
+  </p:cSld>
+  <p:clrMapOvr>
+    <a:masterClrMapping/>
+  </p:clrMapOvr>
+</p:sld>
+</file>
+
 <file path=ppt/slides/slide2.xml><?xml version="1.0" encoding="utf-8"?>
 <p:sld xmlns:a="http://schemas.openxmlformats.org/drawingml/2006/main" xmlns:r="http://schemas.openxmlformats.org/officeDocument/2006/relationships" xmlns:mc="http://schemas.openxmlformats.org/markup-compatibility/2006" xmlns:mv="urn:schemas-microsoft-com:mac:vml" xmlns:p="http://schemas.openxmlformats.org/presentationml/2006/main" xmlns:c="http://schemas.openxmlformats.org/drawingml/2006/chart" xmlns:dgm="http://schemas.openxmlformats.org/drawingml/2006/diagram" xmlns:o="urn:schemas-microsoft-com:office:office" xmlns:v="urn:schemas-microsoft-com:vml" xmlns:pvml="urn:schemas-microsoft-com:office:powerpoint" xmlns:com="http://schemas.openxmlformats.org/drawingml/2006/compatibility" xmlns:p14="http://schemas.microsoft.com/office/powerpoint/2010/main" xmlns:p15="http://schemas.microsoft.com/office/powerpoint/2012/main" xmlns:ahyp="http://schemas.microsoft.com/office/drawing/2018/hyperlinkcolor">
   <p:cSld>
@@ -7032,7 +9424,7 @@
         </p:nvSpPr>
         <p:spPr>
           <a:xfrm>
-            <a:off x="311700" y="445025"/>
+            <a:off x="0" y="95125"/>
             <a:ext cx="8520600" cy="572700"/>
           </a:xfrm>
           <a:prstGeom prst="rect">
@@ -7086,8 +9478,8 @@
         </p:blipFill>
         <p:spPr>
           <a:xfrm>
-            <a:off x="2743200" y="1228725"/>
-            <a:ext cx="6400800" cy="2686050"/>
+            <a:off x="3549600" y="1137088"/>
+            <a:ext cx="5417525" cy="2273425"/>
           </a:xfrm>
           <a:prstGeom prst="rect">
             <a:avLst/>
@@ -7106,7 +9498,7 @@
         </p:nvSpPr>
         <p:spPr>
           <a:xfrm>
-            <a:off x="3549600" y="3529875"/>
+            <a:off x="4044300" y="3162250"/>
             <a:ext cx="4788000" cy="384900"/>
           </a:xfrm>
           <a:prstGeom prst="rect">
@@ -7148,6 +9540,174 @@
           </a:p>
         </p:txBody>
       </p:sp>
+      <p:sp>
+        <p:nvSpPr>
+          <p:cNvPr id="89" name="Google Shape;89;p18"/>
+          <p:cNvSpPr txBox="1"/>
+          <p:nvPr>
+            <p:ph type="title"/>
+          </p:nvPr>
+        </p:nvSpPr>
+        <p:spPr>
+          <a:xfrm>
+            <a:off x="0" y="667825"/>
+            <a:ext cx="8520600" cy="572700"/>
+          </a:xfrm>
+          <a:prstGeom prst="rect">
+            <a:avLst/>
+          </a:prstGeom>
+        </p:spPr>
+        <p:txBody>
+          <a:bodyPr anchorCtr="0" anchor="t" bIns="91425" lIns="91425" spcFirstLastPara="1" rIns="91425" wrap="square" tIns="91425">
+            <a:normAutofit fontScale="90000"/>
+          </a:bodyPr>
+          <a:lstStyle/>
+          <a:p>
+            <a:pPr indent="0" lvl="0" marL="0" rtl="0" algn="l">
+              <a:spcBef>
+                <a:spcPts val="0"/>
+              </a:spcBef>
+              <a:spcAft>
+                <a:spcPts val="0"/>
+              </a:spcAft>
+              <a:buNone/>
+            </a:pPr>
+            <a:r>
+              <a:rPr b="1" lang="en" u="sng"/>
+              <a:t>Challenges</a:t>
+            </a:r>
+            <a:endParaRPr b="1" u="sng"/>
+          </a:p>
+        </p:txBody>
+      </p:sp>
+      <p:sp>
+        <p:nvSpPr>
+          <p:cNvPr id="90" name="Google Shape;90;p18"/>
+          <p:cNvSpPr txBox="1"/>
+          <p:nvPr>
+            <p:ph idx="1" type="body"/>
+          </p:nvPr>
+        </p:nvSpPr>
+        <p:spPr>
+          <a:xfrm>
+            <a:off x="0" y="1240525"/>
+            <a:ext cx="3549600" cy="3416400"/>
+          </a:xfrm>
+          <a:prstGeom prst="rect">
+            <a:avLst/>
+          </a:prstGeom>
+        </p:spPr>
+        <p:txBody>
+          <a:bodyPr anchorCtr="0" anchor="t" bIns="91425" lIns="91425" spcFirstLastPara="1" rIns="91425" wrap="square" tIns="91425">
+            <a:normAutofit/>
+          </a:bodyPr>
+          <a:lstStyle/>
+          <a:p>
+            <a:pPr indent="-342900" lvl="0" marL="457200" rtl="0" algn="l">
+              <a:lnSpc>
+                <a:spcPct val="150000"/>
+              </a:lnSpc>
+              <a:spcBef>
+                <a:spcPts val="0"/>
+              </a:spcBef>
+              <a:spcAft>
+                <a:spcPts val="0"/>
+              </a:spcAft>
+              <a:buSzPts val="1800"/>
+              <a:buChar char="-"/>
+            </a:pPr>
+            <a:r>
+              <a:rPr lang="en"/>
+              <a:t>In MLFQ scheduler, the priority is dynamic and changes based on processes behavior.</a:t>
+            </a:r>
+            <a:endParaRPr/>
+          </a:p>
+          <a:p>
+            <a:pPr indent="-342900" lvl="0" marL="457200" rtl="0" algn="l">
+              <a:lnSpc>
+                <a:spcPct val="150000"/>
+              </a:lnSpc>
+              <a:spcBef>
+                <a:spcPts val="0"/>
+              </a:spcBef>
+              <a:spcAft>
+                <a:spcPts val="0"/>
+              </a:spcAft>
+              <a:buSzPts val="1800"/>
+              <a:buChar char="-"/>
+            </a:pPr>
+            <a:r>
+              <a:rPr lang="en"/>
+              <a:t>Gantt</a:t>
+            </a:r>
+            <a:r>
+              <a:rPr lang="en"/>
+              <a:t> chart generated</a:t>
+            </a:r>
+            <a:endParaRPr/>
+          </a:p>
+          <a:p>
+            <a:pPr indent="-317500" lvl="1" marL="914400" rtl="0" algn="l">
+              <a:lnSpc>
+                <a:spcPct val="150000"/>
+              </a:lnSpc>
+              <a:spcBef>
+                <a:spcPts val="0"/>
+              </a:spcBef>
+              <a:spcAft>
+                <a:spcPts val="0"/>
+              </a:spcAft>
+              <a:buSzPts val="1400"/>
+              <a:buChar char="-"/>
+            </a:pPr>
+            <a:r>
+              <a:rPr lang="en"/>
+              <a:t>Time management</a:t>
+            </a:r>
+            <a:endParaRPr/>
+          </a:p>
+          <a:p>
+            <a:pPr indent="-317500" lvl="2" marL="1371600" rtl="0" algn="l">
+              <a:lnSpc>
+                <a:spcPct val="150000"/>
+              </a:lnSpc>
+              <a:spcBef>
+                <a:spcPts val="0"/>
+              </a:spcBef>
+              <a:spcAft>
+                <a:spcPts val="0"/>
+              </a:spcAft>
+              <a:buSzPts val="1400"/>
+              <a:buChar char="-"/>
+            </a:pPr>
+            <a:r>
+              <a:rPr lang="en"/>
+              <a:t>Time allotment</a:t>
+            </a:r>
+            <a:endParaRPr/>
+          </a:p>
+          <a:p>
+            <a:pPr indent="-317500" lvl="2" marL="1371600" rtl="0" algn="l">
+              <a:lnSpc>
+                <a:spcPct val="150000"/>
+              </a:lnSpc>
+              <a:spcBef>
+                <a:spcPts val="0"/>
+              </a:spcBef>
+              <a:spcAft>
+                <a:spcPts val="0"/>
+              </a:spcAft>
+              <a:buSzPts val="1400"/>
+              <a:buChar char="-"/>
+            </a:pPr>
+            <a:r>
+              <a:rPr lang="en"/>
+              <a:t>Time period</a:t>
+            </a:r>
+            <a:endParaRPr/>
+          </a:p>
+        </p:txBody>
+      </p:sp>
     </p:spTree>
   </p:cSld>
   <p:clrMapOvr>
@@ -7161,7 +9721,7 @@
   <p:cSld>
     <p:spTree>
       <p:nvGrpSpPr>
-        <p:cNvPr id="92" name="Shape 92"/>
+        <p:cNvPr id="94" name="Shape 94"/>
         <p:cNvGrpSpPr/>
         <p:nvPr/>
       </p:nvGrpSpPr>
@@ -7175,7 +9735,419 @@
       </p:grpSpPr>
       <p:sp>
         <p:nvSpPr>
-          <p:cNvPr id="93" name="Google Shape;93;p19"/>
+          <p:cNvPr id="95" name="Google Shape;95;p19"/>
+          <p:cNvSpPr txBox="1"/>
+          <p:nvPr>
+            <p:ph type="title"/>
+          </p:nvPr>
+        </p:nvSpPr>
+        <p:spPr>
+          <a:xfrm>
+            <a:off x="0" y="374450"/>
+            <a:ext cx="8520600" cy="572700"/>
+          </a:xfrm>
+          <a:prstGeom prst="rect">
+            <a:avLst/>
+          </a:prstGeom>
+        </p:spPr>
+        <p:txBody>
+          <a:bodyPr anchorCtr="0" anchor="t" bIns="91425" lIns="91425" spcFirstLastPara="1" rIns="91425" wrap="square" tIns="91425">
+            <a:normAutofit fontScale="90000"/>
+          </a:bodyPr>
+          <a:lstStyle/>
+          <a:p>
+            <a:pPr indent="0" lvl="0" marL="0" rtl="0" algn="l">
+              <a:spcBef>
+                <a:spcPts val="0"/>
+              </a:spcBef>
+              <a:spcAft>
+                <a:spcPts val="0"/>
+              </a:spcAft>
+              <a:buNone/>
+            </a:pPr>
+            <a:r>
+              <a:rPr lang="en"/>
+              <a:t>Solution</a:t>
+            </a:r>
+            <a:endParaRPr/>
+          </a:p>
+        </p:txBody>
+      </p:sp>
+      <p:sp>
+        <p:nvSpPr>
+          <p:cNvPr id="96" name="Google Shape;96;p19"/>
+          <p:cNvSpPr txBox="1"/>
+          <p:nvPr>
+            <p:ph idx="1" type="body"/>
+          </p:nvPr>
+        </p:nvSpPr>
+        <p:spPr>
+          <a:xfrm>
+            <a:off x="0" y="1079075"/>
+            <a:ext cx="5552100" cy="3416400"/>
+          </a:xfrm>
+          <a:prstGeom prst="rect">
+            <a:avLst/>
+          </a:prstGeom>
+        </p:spPr>
+        <p:txBody>
+          <a:bodyPr anchorCtr="0" anchor="t" bIns="91425" lIns="91425" spcFirstLastPara="1" rIns="91425" wrap="square" tIns="91425">
+            <a:normAutofit/>
+          </a:bodyPr>
+          <a:lstStyle/>
+          <a:p>
+            <a:pPr indent="-342900" lvl="0" marL="457200" rtl="0" algn="l">
+              <a:lnSpc>
+                <a:spcPct val="150000"/>
+              </a:lnSpc>
+              <a:spcBef>
+                <a:spcPts val="0"/>
+              </a:spcBef>
+              <a:spcAft>
+                <a:spcPts val="0"/>
+              </a:spcAft>
+              <a:buSzPts val="1800"/>
+              <a:buChar char="-"/>
+            </a:pPr>
+            <a:r>
+              <a:rPr lang="en"/>
+              <a:t>Have a big loop condition to keep track of time allotment and time period. Immediately updated priority queue and order in queue when demoted. </a:t>
+            </a:r>
+            <a:endParaRPr/>
+          </a:p>
+          <a:p>
+            <a:pPr indent="-342900" lvl="0" marL="457200" rtl="0" algn="l">
+              <a:lnSpc>
+                <a:spcPct val="150000"/>
+              </a:lnSpc>
+              <a:spcBef>
+                <a:spcPts val="0"/>
+              </a:spcBef>
+              <a:spcAft>
+                <a:spcPts val="0"/>
+              </a:spcAft>
+              <a:buSzPts val="1800"/>
+              <a:buChar char="-"/>
+            </a:pPr>
+            <a:r>
+              <a:rPr lang="en"/>
+              <a:t>Gantt Chart generated</a:t>
+            </a:r>
+            <a:endParaRPr/>
+          </a:p>
+          <a:p>
+            <a:pPr indent="-317500" lvl="1" marL="914400" rtl="0" algn="l">
+              <a:lnSpc>
+                <a:spcPct val="150000"/>
+              </a:lnSpc>
+              <a:spcBef>
+                <a:spcPts val="0"/>
+              </a:spcBef>
+              <a:spcAft>
+                <a:spcPts val="0"/>
+              </a:spcAft>
+              <a:buSzPts val="1400"/>
+              <a:buChar char="-"/>
+            </a:pPr>
+            <a:r>
+              <a:rPr lang="en"/>
+              <a:t>Stored every data required to generate a Gantt chart</a:t>
+            </a:r>
+            <a:endParaRPr/>
+          </a:p>
+          <a:p>
+            <a:pPr indent="-317500" lvl="2" marL="1371600" rtl="0" algn="l">
+              <a:lnSpc>
+                <a:spcPct val="150000"/>
+              </a:lnSpc>
+              <a:spcBef>
+                <a:spcPts val="0"/>
+              </a:spcBef>
+              <a:spcAft>
+                <a:spcPts val="0"/>
+              </a:spcAft>
+              <a:buSzPts val="1400"/>
+              <a:buChar char="-"/>
+            </a:pPr>
+            <a:r>
+              <a:rPr lang="en"/>
+              <a:t>Having separated timeLine to stored data</a:t>
+            </a:r>
+            <a:endParaRPr/>
+          </a:p>
+          <a:p>
+            <a:pPr indent="-317500" lvl="1" marL="914400" rtl="0" algn="l">
+              <a:lnSpc>
+                <a:spcPct val="150000"/>
+              </a:lnSpc>
+              <a:spcBef>
+                <a:spcPts val="0"/>
+              </a:spcBef>
+              <a:spcAft>
+                <a:spcPts val="0"/>
+              </a:spcAft>
+              <a:buSzPts val="1400"/>
+              <a:buChar char="-"/>
+            </a:pPr>
+            <a:r>
+              <a:rPr lang="en"/>
+              <a:t>Format it using a for loop to run from 0 to currentTime</a:t>
+            </a:r>
+            <a:endParaRPr/>
+          </a:p>
+        </p:txBody>
+      </p:sp>
+      <p:pic>
+        <p:nvPicPr>
+          <p:cNvPr id="97" name="Google Shape;97;p19"/>
+          <p:cNvPicPr preferRelativeResize="0"/>
+          <p:nvPr/>
+        </p:nvPicPr>
+        <p:blipFill>
+          <a:blip r:embed="rId3">
+            <a:alphaModFix/>
+          </a:blip>
+          <a:stretch>
+            <a:fillRect/>
+          </a:stretch>
+        </p:blipFill>
+        <p:spPr>
+          <a:xfrm>
+            <a:off x="5552102" y="918450"/>
+            <a:ext cx="3423824" cy="3306600"/>
+          </a:xfrm>
+          <a:prstGeom prst="rect">
+            <a:avLst/>
+          </a:prstGeom>
+          <a:noFill/>
+          <a:ln>
+            <a:noFill/>
+          </a:ln>
+        </p:spPr>
+      </p:pic>
+      <p:pic>
+        <p:nvPicPr>
+          <p:cNvPr id="98" name="Google Shape;98;p19"/>
+          <p:cNvPicPr preferRelativeResize="0"/>
+          <p:nvPr/>
+        </p:nvPicPr>
+        <p:blipFill>
+          <a:blip r:embed="rId4">
+            <a:alphaModFix/>
+          </a:blip>
+          <a:stretch>
+            <a:fillRect/>
+          </a:stretch>
+        </p:blipFill>
+        <p:spPr>
+          <a:xfrm>
+            <a:off x="194350" y="2797250"/>
+            <a:ext cx="5163401" cy="1809675"/>
+          </a:xfrm>
+          <a:prstGeom prst="rect">
+            <a:avLst/>
+          </a:prstGeom>
+          <a:noFill/>
+          <a:ln>
+            <a:noFill/>
+          </a:ln>
+        </p:spPr>
+      </p:pic>
+    </p:spTree>
+  </p:cSld>
+  <p:clrMapOvr>
+    <a:masterClrMapping/>
+  </p:clrMapOvr>
+  <p:timing>
+    <p:tnLst>
+      <p:par>
+        <p:cTn dur="indefinite" nodeType="tmRoot" restart="never">
+          <p:childTnLst>
+            <p:seq concurrent="1" nextAc="seek">
+              <p:cTn dur="indefinite" id="2" nodeType="mainSeq">
+                <p:childTnLst>
+                  <p:par>
+                    <p:cTn fill="hold">
+                      <p:stCondLst>
+                        <p:cond delay="indefinite"/>
+                      </p:stCondLst>
+                      <p:childTnLst>
+                        <p:par>
+                          <p:cTn fill="hold">
+                            <p:stCondLst>
+                              <p:cond delay="0"/>
+                            </p:stCondLst>
+                            <p:childTnLst>
+                              <p:par>
+                                <p:cTn fill="hold" nodeType="clickEffect" presetClass="exit" presetID="1" presetSubtype="0">
+                                  <p:stCondLst>
+                                    <p:cond delay="0"/>
+                                  </p:stCondLst>
+                                  <p:childTnLst>
+                                    <p:set>
+                                      <p:cBhvr>
+                                        <p:cTn dur="1" fill="hold">
+                                          <p:stCondLst>
+                                            <p:cond delay="0"/>
+                                          </p:stCondLst>
+                                        </p:cTn>
+                                        <p:tgtEl>
+                                          <p:spTgt spid="98"/>
+                                        </p:tgtEl>
+                                        <p:attrNameLst>
+                                          <p:attrName>style.visibility</p:attrName>
+                                        </p:attrNameLst>
+                                      </p:cBhvr>
+                                      <p:to>
+                                        <p:strVal val="hidden"/>
+                                      </p:to>
+                                    </p:set>
+                                  </p:childTnLst>
+                                </p:cTn>
+                              </p:par>
+                            </p:childTnLst>
+                          </p:cTn>
+                        </p:par>
+                      </p:childTnLst>
+                    </p:cTn>
+                  </p:par>
+                </p:childTnLst>
+              </p:cTn>
+              <p:prevCondLst>
+                <p:cond evt="onPrev">
+                  <p:tgtEl>
+                    <p:sldTgt/>
+                  </p:tgtEl>
+                </p:cond>
+              </p:prevCondLst>
+              <p:nextCondLst>
+                <p:cond evt="onNext">
+                  <p:tgtEl>
+                    <p:sldTgt/>
+                  </p:tgtEl>
+                </p:cond>
+              </p:nextCondLst>
+            </p:seq>
+          </p:childTnLst>
+        </p:cTn>
+      </p:par>
+    </p:tnLst>
+  </p:timing>
+</p:sld>
+</file>
+
+<file path=ppt/slides/slide8.xml><?xml version="1.0" encoding="utf-8"?>
+<p:sld xmlns:a="http://schemas.openxmlformats.org/drawingml/2006/main" xmlns:r="http://schemas.openxmlformats.org/officeDocument/2006/relationships" xmlns:mc="http://schemas.openxmlformats.org/markup-compatibility/2006" xmlns:mv="urn:schemas-microsoft-com:mac:vml" xmlns:p="http://schemas.openxmlformats.org/presentationml/2006/main" xmlns:c="http://schemas.openxmlformats.org/drawingml/2006/chart" xmlns:dgm="http://schemas.openxmlformats.org/drawingml/2006/diagram" xmlns:o="urn:schemas-microsoft-com:office:office" xmlns:v="urn:schemas-microsoft-com:vml" xmlns:pvml="urn:schemas-microsoft-com:office:powerpoint" xmlns:com="http://schemas.openxmlformats.org/drawingml/2006/compatibility" xmlns:p14="http://schemas.microsoft.com/office/powerpoint/2010/main" xmlns:p15="http://schemas.microsoft.com/office/powerpoint/2012/main" xmlns:ahyp="http://schemas.microsoft.com/office/drawing/2018/hyperlinkcolor">
+  <p:cSld>
+    <p:spTree>
+      <p:nvGrpSpPr>
+        <p:cNvPr id="102" name="Shape 102"/>
+        <p:cNvGrpSpPr/>
+        <p:nvPr/>
+      </p:nvGrpSpPr>
+      <p:grpSpPr>
+        <a:xfrm>
+          <a:off x="0" y="0"/>
+          <a:ext cx="0" cy="0"/>
+          <a:chOff x="0" y="0"/>
+          <a:chExt cx="0" cy="0"/>
+        </a:xfrm>
+      </p:grpSpPr>
+      <p:sp>
+        <p:nvSpPr>
+          <p:cNvPr id="103" name="Google Shape;103;p20"/>
+          <p:cNvSpPr txBox="1"/>
+          <p:nvPr>
+            <p:ph type="title"/>
+          </p:nvPr>
+        </p:nvSpPr>
+        <p:spPr>
+          <a:xfrm>
+            <a:off x="0" y="374450"/>
+            <a:ext cx="8520600" cy="572700"/>
+          </a:xfrm>
+          <a:prstGeom prst="rect">
+            <a:avLst/>
+          </a:prstGeom>
+        </p:spPr>
+        <p:txBody>
+          <a:bodyPr anchorCtr="0" anchor="t" bIns="91425" lIns="91425" spcFirstLastPara="1" rIns="91425" wrap="square" tIns="91425">
+            <a:normAutofit fontScale="90000"/>
+          </a:bodyPr>
+          <a:lstStyle/>
+          <a:p>
+            <a:pPr indent="0" lvl="0" marL="0" rtl="0" algn="l">
+              <a:spcBef>
+                <a:spcPts val="0"/>
+              </a:spcBef>
+              <a:spcAft>
+                <a:spcPts val="0"/>
+              </a:spcAft>
+              <a:buNone/>
+            </a:pPr>
+            <a:r>
+              <a:rPr lang="en"/>
+              <a:t>Result</a:t>
+            </a:r>
+            <a:endParaRPr/>
+          </a:p>
+        </p:txBody>
+      </p:sp>
+      <p:pic>
+        <p:nvPicPr>
+          <p:cNvPr id="104" name="Google Shape;104;p20"/>
+          <p:cNvPicPr preferRelativeResize="0"/>
+          <p:nvPr/>
+        </p:nvPicPr>
+        <p:blipFill rotWithShape="1">
+          <a:blip r:embed="rId3">
+            <a:alphaModFix/>
+          </a:blip>
+          <a:srcRect b="200" l="0" r="0" t="-200"/>
+          <a:stretch/>
+        </p:blipFill>
+        <p:spPr>
+          <a:xfrm>
+            <a:off x="2036213" y="853058"/>
+            <a:ext cx="4448175" cy="4105275"/>
+          </a:xfrm>
+          <a:prstGeom prst="rect">
+            <a:avLst/>
+          </a:prstGeom>
+          <a:noFill/>
+          <a:ln>
+            <a:noFill/>
+          </a:ln>
+        </p:spPr>
+      </p:pic>
+    </p:spTree>
+  </p:cSld>
+  <p:clrMapOvr>
+    <a:masterClrMapping/>
+  </p:clrMapOvr>
+</p:sld>
+</file>
+
+<file path=ppt/slides/slide9.xml><?xml version="1.0" encoding="utf-8"?>
+<p:sld xmlns:a="http://schemas.openxmlformats.org/drawingml/2006/main" xmlns:r="http://schemas.openxmlformats.org/officeDocument/2006/relationships" xmlns:mc="http://schemas.openxmlformats.org/markup-compatibility/2006" xmlns:mv="urn:schemas-microsoft-com:mac:vml" xmlns:p="http://schemas.openxmlformats.org/presentationml/2006/main" xmlns:c="http://schemas.openxmlformats.org/drawingml/2006/chart" xmlns:dgm="http://schemas.openxmlformats.org/drawingml/2006/diagram" xmlns:o="urn:schemas-microsoft-com:office:office" xmlns:v="urn:schemas-microsoft-com:vml" xmlns:pvml="urn:schemas-microsoft-com:office:powerpoint" xmlns:com="http://schemas.openxmlformats.org/drawingml/2006/compatibility" xmlns:p14="http://schemas.microsoft.com/office/powerpoint/2010/main" xmlns:p15="http://schemas.microsoft.com/office/powerpoint/2012/main" xmlns:ahyp="http://schemas.microsoft.com/office/drawing/2018/hyperlinkcolor">
+  <p:cSld>
+    <p:spTree>
+      <p:nvGrpSpPr>
+        <p:cNvPr id="108" name="Shape 108"/>
+        <p:cNvGrpSpPr/>
+        <p:nvPr/>
+      </p:nvGrpSpPr>
+      <p:grpSpPr>
+        <a:xfrm>
+          <a:off x="0" y="0"/>
+          <a:ext cx="0" cy="0"/>
+          <a:chOff x="0" y="0"/>
+          <a:chExt cx="0" cy="0"/>
+        </a:xfrm>
+      </p:grpSpPr>
+      <p:sp>
+        <p:nvSpPr>
+          <p:cNvPr id="109" name="Google Shape;109;p21"/>
           <p:cNvSpPr txBox="1"/>
           <p:nvPr>
             <p:ph type="title"/>
@@ -7207,7 +10179,63 @@
             </a:pPr>
             <a:r>
               <a:rPr lang="en"/>
-              <a:t>Challenges</a:t>
+              <a:t>Problem 3  </a:t>
+            </a:r>
+            <a:endParaRPr/>
+          </a:p>
+          <a:p>
+            <a:pPr indent="0" lvl="0" marL="0" rtl="0" algn="l">
+              <a:spcBef>
+                <a:spcPts val="0"/>
+              </a:spcBef>
+              <a:spcAft>
+                <a:spcPts val="0"/>
+              </a:spcAft>
+              <a:buClr>
+                <a:schemeClr val="dk1"/>
+              </a:buClr>
+              <a:buSzPct val="39286"/>
+              <a:buFont typeface="Arial"/>
+              <a:buNone/>
+            </a:pPr>
+            <a:r>
+              <a:rPr lang="en"/>
+              <a:t>Multiprocessor Scheduling with Work Stealing </a:t>
+            </a:r>
+            <a:endParaRPr/>
+          </a:p>
+          <a:p>
+            <a:pPr indent="0" lvl="0" marL="0" rtl="0" algn="l">
+              <a:spcBef>
+                <a:spcPts val="0"/>
+              </a:spcBef>
+              <a:spcAft>
+                <a:spcPts val="0"/>
+              </a:spcAft>
+              <a:buClr>
+                <a:schemeClr val="dk1"/>
+              </a:buClr>
+              <a:buSzPct val="39286"/>
+              <a:buFont typeface="Arial"/>
+              <a:buNone/>
+            </a:pPr>
+            <a:r>
+              <a:t/>
+            </a:r>
+            <a:endParaRPr/>
+          </a:p>
+          <a:p>
+            <a:pPr indent="0" lvl="0" marL="0" rtl="0" algn="l">
+              <a:spcBef>
+                <a:spcPts val="0"/>
+              </a:spcBef>
+              <a:spcAft>
+                <a:spcPts val="0"/>
+              </a:spcAft>
+              <a:buNone/>
+            </a:pPr>
+            <a:r>
+              <a:t/>
             </a:r>
             <a:endParaRPr/>
           </a:p>
@@ -7215,7 +10243,7 @@
       </p:sp>
       <p:sp>
         <p:nvSpPr>
-          <p:cNvPr id="94" name="Google Shape;94;p19"/>
+          <p:cNvPr id="110" name="Google Shape;110;p21"/>
           <p:cNvSpPr txBox="1"/>
           <p:nvPr>
             <p:ph idx="1" type="body"/>
@@ -7236,158 +10264,62 @@
           </a:bodyPr>
           <a:lstStyle/>
           <a:p>
-            <a:pPr indent="-342900" lvl="0" marL="457200" rtl="0" algn="l">
-              <a:spcBef>
-                <a:spcPts val="0"/>
-              </a:spcBef>
-              <a:spcAft>
-                <a:spcPts val="0"/>
-              </a:spcAft>
-              <a:buSzPts val="1800"/>
-              <a:buChar char="-"/>
+            <a:pPr indent="0" lvl="0" marL="0" rtl="0" algn="l">
+              <a:spcBef>
+                <a:spcPts val="0"/>
+              </a:spcBef>
+              <a:spcAft>
+                <a:spcPts val="0"/>
+              </a:spcAft>
+              <a:buClr>
+                <a:schemeClr val="dk1"/>
+              </a:buClr>
+              <a:buSzPts val="1100"/>
+              <a:buFont typeface="Arial"/>
+              <a:buNone/>
+            </a:pPr>
+            <a:r>
+              <a:rPr lang="en"/>
+              <a:t>-</a:t>
+            </a:r>
+            <a:r>
+              <a:rPr lang="en"/>
+              <a:t>Amal Alqahtani</a:t>
+            </a:r>
+            <a:endParaRPr/>
+          </a:p>
+          <a:p>
+            <a:pPr indent="0" lvl="0" marL="0" rtl="0" algn="l">
+              <a:spcBef>
+                <a:spcPts val="1200"/>
+              </a:spcBef>
+              <a:spcAft>
+                <a:spcPts val="0"/>
+              </a:spcAft>
+              <a:buClr>
+                <a:schemeClr val="dk1"/>
+              </a:buClr>
+              <a:buSzPts val="1100"/>
+              <a:buFont typeface="Arial"/>
+              <a:buNone/>
             </a:pPr>
             <a:r>
               <a:t/>
             </a:r>
             <a:endParaRPr/>
           </a:p>
-        </p:txBody>
-      </p:sp>
-    </p:spTree>
-  </p:cSld>
-  <p:clrMapOvr>
-    <a:masterClrMapping/>
-  </p:clrMapOvr>
-</p:sld>
-</file>
-
-<file path=ppt/slides/slide8.xml><?xml version="1.0" encoding="utf-8"?>
-<p:sld xmlns:a="http://schemas.openxmlformats.org/drawingml/2006/main" xmlns:r="http://schemas.openxmlformats.org/officeDocument/2006/relationships" xmlns:mc="http://schemas.openxmlformats.org/markup-compatibility/2006" xmlns:mv="urn:schemas-microsoft-com:mac:vml" xmlns:p="http://schemas.openxmlformats.org/presentationml/2006/main" xmlns:c="http://schemas.openxmlformats.org/drawingml/2006/chart" xmlns:dgm="http://schemas.openxmlformats.org/drawingml/2006/diagram" xmlns:o="urn:schemas-microsoft-com:office:office" xmlns:v="urn:schemas-microsoft-com:vml" xmlns:pvml="urn:schemas-microsoft-com:office:powerpoint" xmlns:com="http://schemas.openxmlformats.org/drawingml/2006/compatibility" xmlns:p14="http://schemas.microsoft.com/office/powerpoint/2010/main" xmlns:p15="http://schemas.microsoft.com/office/powerpoint/2012/main" xmlns:ahyp="http://schemas.microsoft.com/office/drawing/2018/hyperlinkcolor">
-  <p:cSld>
-    <p:spTree>
-      <p:nvGrpSpPr>
-        <p:cNvPr id="98" name="Shape 98"/>
-        <p:cNvGrpSpPr/>
-        <p:nvPr/>
-      </p:nvGrpSpPr>
-      <p:grpSpPr>
-        <a:xfrm>
-          <a:off x="0" y="0"/>
-          <a:ext cx="0" cy="0"/>
-          <a:chOff x="0" y="0"/>
-          <a:chExt cx="0" cy="0"/>
-        </a:xfrm>
-      </p:grpSpPr>
-      <p:sp>
-        <p:nvSpPr>
-          <p:cNvPr id="99" name="Google Shape;99;p20"/>
-          <p:cNvSpPr txBox="1"/>
-          <p:nvPr>
-            <p:ph type="title"/>
-          </p:nvPr>
-        </p:nvSpPr>
-        <p:spPr>
-          <a:xfrm>
-            <a:off x="311700" y="445025"/>
-            <a:ext cx="8520600" cy="572700"/>
-          </a:xfrm>
-          <a:prstGeom prst="rect">
-            <a:avLst/>
-          </a:prstGeom>
-        </p:spPr>
-        <p:txBody>
-          <a:bodyPr anchorCtr="0" anchor="t" bIns="91425" lIns="91425" spcFirstLastPara="1" rIns="91425" wrap="square" tIns="91425">
-            <a:normAutofit fontScale="90000"/>
-          </a:bodyPr>
-          <a:lstStyle/>
           <a:p>
             <a:pPr indent="0" lvl="0" marL="0" rtl="0" algn="l">
               <a:spcBef>
-                <a:spcPts val="0"/>
-              </a:spcBef>
-              <a:spcAft>
-                <a:spcPts val="0"/>
-              </a:spcAft>
-              <a:buNone/>
-            </a:pPr>
-            <a:r>
-              <a:rPr lang="en"/>
-              <a:t>Contribution	</a:t>
-            </a:r>
-            <a:endParaRPr/>
-          </a:p>
-        </p:txBody>
-      </p:sp>
-      <p:sp>
-        <p:nvSpPr>
-          <p:cNvPr id="100" name="Google Shape;100;p20"/>
-          <p:cNvSpPr txBox="1"/>
-          <p:nvPr>
-            <p:ph idx="1" type="body"/>
-          </p:nvPr>
-        </p:nvSpPr>
-        <p:spPr>
-          <a:xfrm>
-            <a:off x="311700" y="1152475"/>
-            <a:ext cx="8520600" cy="3416400"/>
-          </a:xfrm>
-          <a:prstGeom prst="rect">
-            <a:avLst/>
-          </a:prstGeom>
-        </p:spPr>
-        <p:txBody>
-          <a:bodyPr anchorCtr="0" anchor="t" bIns="91425" lIns="91425" spcFirstLastPara="1" rIns="91425" wrap="square" tIns="91425">
-            <a:normAutofit/>
-          </a:bodyPr>
-          <a:lstStyle/>
-          <a:p>
-            <a:pPr indent="-342900" lvl="0" marL="457200" rtl="0" algn="l">
-              <a:spcBef>
-                <a:spcPts val="0"/>
-              </a:spcBef>
-              <a:spcAft>
-                <a:spcPts val="0"/>
-              </a:spcAft>
-              <a:buSzPts val="1800"/>
-              <a:buChar char="●"/>
-            </a:pPr>
-            <a:r>
-              <a:rPr lang="en"/>
-              <a:t>Problem 1: Jordan Strine</a:t>
-            </a:r>
-            <a:endParaRPr/>
-          </a:p>
-          <a:p>
-            <a:pPr indent="-342900" lvl="0" marL="457200" rtl="0" algn="l">
-              <a:spcBef>
-                <a:spcPts val="0"/>
-              </a:spcBef>
-              <a:spcAft>
-                <a:spcPts val="0"/>
-              </a:spcAft>
-              <a:buSzPts val="1800"/>
-              <a:buChar char="●"/>
-            </a:pPr>
-            <a:r>
-              <a:rPr lang="en"/>
-              <a:t>Problem 2: Ngoc Lan Anh Nguyen</a:t>
-            </a:r>
-            <a:endParaRPr/>
-          </a:p>
-          <a:p>
-            <a:pPr indent="-342900" lvl="0" marL="457200" rtl="0" algn="l">
-              <a:spcBef>
-                <a:spcPts val="0"/>
-              </a:spcBef>
-              <a:spcAft>
-                <a:spcPts val="0"/>
-              </a:spcAft>
-              <a:buSzPts val="1800"/>
-              <a:buChar char="●"/>
-            </a:pPr>
-            <a:r>
-              <a:rPr lang="en"/>
-              <a:t>Problem 3: Amal Allas A Alqahtani</a:t>
+                <a:spcPts val="1200"/>
+              </a:spcBef>
+              <a:spcAft>
+                <a:spcPts val="1200"/>
+              </a:spcAft>
+              <a:buNone/>
+            </a:pPr>
+            <a:r>
+              <a:t/>
             </a:r>
             <a:endParaRPr/>
           </a:p>
